--- a/attachments/Canonical - Building sovereignity cloud - Event Notes.pptx
+++ b/attachments/Canonical - Building sovereignity cloud - Event Notes.pptx
@@ -4,6 +4,9 @@
   <p:sldMasterIdLst>
     <p:sldMasterId id="2147483648" r:id="rId1"/>
   </p:sldMasterIdLst>
+  <p:notesMasterIdLst>
+    <p:notesMasterId r:id="rId20"/>
+  </p:notesMasterIdLst>
   <p:sldIdLst>
     <p:sldId id="256" r:id="rId2"/>
     <p:sldId id="257" r:id="rId3"/>
@@ -140,6 +143,2521 @@
 </p:presentation>
 </file>
 
+<file path=ppt/revisionInfo.xml><?xml version="1.0" encoding="utf-8"?>
+<p1510:revInfo xmlns:a="http://schemas.openxmlformats.org/drawingml/2006/main" xmlns:r="http://schemas.openxmlformats.org/officeDocument/2006/relationships" xmlns:p1510="http://schemas.microsoft.com/office/powerpoint/2015/10/main">
+  <p1510:revLst>
+    <p1510:client id="{E02D6D45-B94D-457C-8328-AE42C14F3269}" v="18" dt="2026-08-17T08:55:47.583"/>
+  </p1510:revLst>
+</p1510:revInfo>
+</file>
+
+<file path=ppt/changesInfos/changesInfo1.xml><?xml version="1.0" encoding="utf-8"?>
+<pc:chgInfo xmlns:a="http://schemas.openxmlformats.org/drawingml/2006/main" xmlns:r="http://schemas.openxmlformats.org/officeDocument/2006/relationships" xmlns:ac="http://schemas.microsoft.com/office/drawing/2013/main/command" xmlns:pc="http://schemas.microsoft.com/office/powerpoint/2013/main/command">
+  <pc:docChgLst>
+    <pc:chgData name="Ihonosetale Oseghale" userId="b1c3f33a-470a-45b8-9def-2cfcd8b1ae0a" providerId="ADAL" clId="{B0BAAFC9-0A00-41D8-8861-6E2A4290657B}"/>
+    <pc:docChg chg="modSld">
+      <pc:chgData name="Ihonosetale Oseghale" userId="b1c3f33a-470a-45b8-9def-2cfcd8b1ae0a" providerId="ADAL" clId="{B0BAAFC9-0A00-41D8-8861-6E2A4290657B}" dt="2026-08-17T08:56:06.955" v="3" actId="1076"/>
+      <pc:docMkLst>
+        <pc:docMk/>
+      </pc:docMkLst>
+      <pc:sldChg chg="modNotesTx">
+        <pc:chgData name="Ihonosetale Oseghale" userId="b1c3f33a-470a-45b8-9def-2cfcd8b1ae0a" providerId="ADAL" clId="{B0BAAFC9-0A00-41D8-8861-6E2A4290657B}" dt="2026-08-17T08:54:35.849" v="2" actId="20577"/>
+        <pc:sldMkLst>
+          <pc:docMk/>
+          <pc:sldMk cId="0" sldId="256"/>
+        </pc:sldMkLst>
+      </pc:sldChg>
+      <pc:sldChg chg="modSp mod">
+        <pc:chgData name="Ihonosetale Oseghale" userId="b1c3f33a-470a-45b8-9def-2cfcd8b1ae0a" providerId="ADAL" clId="{B0BAAFC9-0A00-41D8-8861-6E2A4290657B}" dt="2026-08-17T08:56:06.955" v="3" actId="1076"/>
+        <pc:sldMkLst>
+          <pc:docMk/>
+          <pc:sldMk cId="0" sldId="258"/>
+        </pc:sldMkLst>
+        <pc:spChg chg="mod">
+          <ac:chgData name="Ihonosetale Oseghale" userId="b1c3f33a-470a-45b8-9def-2cfcd8b1ae0a" providerId="ADAL" clId="{B0BAAFC9-0A00-41D8-8861-6E2A4290657B}" dt="2026-08-17T08:56:06.955" v="3" actId="1076"/>
+          <ac:spMkLst>
+            <pc:docMk/>
+            <pc:sldMk cId="0" sldId="258"/>
+            <ac:spMk id="18" creationId="{00000000-0000-0000-0000-000000000000}"/>
+          </ac:spMkLst>
+        </pc:spChg>
+      </pc:sldChg>
+    </pc:docChg>
+  </pc:docChgLst>
+</pc:chgInfo>
+</file>
+
+<file path=ppt/notesMasters/notesMaster1.xml><?xml version="1.0" encoding="utf-8"?>
+<p:notesMaster xmlns:a="http://schemas.openxmlformats.org/drawingml/2006/main" xmlns:r="http://schemas.openxmlformats.org/officeDocument/2006/relationships" xmlns:p="http://schemas.openxmlformats.org/presentationml/2006/main">
+  <p:cSld>
+    <p:bg>
+      <p:bgRef idx="1001">
+        <a:schemeClr val="bg1"/>
+      </p:bgRef>
+    </p:bg>
+    <p:spTree>
+      <p:nvGrpSpPr>
+        <p:cNvPr id="1" name=""/>
+        <p:cNvGrpSpPr/>
+        <p:nvPr/>
+      </p:nvGrpSpPr>
+      <p:grpSpPr>
+        <a:xfrm>
+          <a:off x="0" y="0"/>
+          <a:ext cx="0" cy="0"/>
+          <a:chOff x="0" y="0"/>
+          <a:chExt cx="0" cy="0"/>
+        </a:xfrm>
+      </p:grpSpPr>
+      <p:sp>
+        <p:nvSpPr>
+          <p:cNvPr id="2" name="Header Placeholder 1"/>
+          <p:cNvSpPr>
+            <a:spLocks noGrp="1"/>
+          </p:cNvSpPr>
+          <p:nvPr>
+            <p:ph type="hdr" sz="quarter"/>
+          </p:nvPr>
+        </p:nvSpPr>
+        <p:spPr>
+          <a:xfrm>
+            <a:off x="0" y="0"/>
+            <a:ext cx="2971800" cy="458788"/>
+          </a:xfrm>
+          <a:prstGeom prst="rect">
+            <a:avLst/>
+          </a:prstGeom>
+        </p:spPr>
+        <p:txBody>
+          <a:bodyPr vert="horz" lIns="91440" tIns="45720" rIns="91440" bIns="45720" rtlCol="0"/>
+          <a:lstStyle>
+            <a:lvl1pPr algn="l">
+              <a:defRPr sz="1200"/>
+            </a:lvl1pPr>
+          </a:lstStyle>
+          <a:p>
+            <a:endParaRPr lang="en-GB"/>
+          </a:p>
+        </p:txBody>
+      </p:sp>
+      <p:sp>
+        <p:nvSpPr>
+          <p:cNvPr id="3" name="Date Placeholder 2"/>
+          <p:cNvSpPr>
+            <a:spLocks noGrp="1"/>
+          </p:cNvSpPr>
+          <p:nvPr>
+            <p:ph type="dt" idx="1"/>
+          </p:nvPr>
+        </p:nvSpPr>
+        <p:spPr>
+          <a:xfrm>
+            <a:off x="3884613" y="0"/>
+            <a:ext cx="2971800" cy="458788"/>
+          </a:xfrm>
+          <a:prstGeom prst="rect">
+            <a:avLst/>
+          </a:prstGeom>
+        </p:spPr>
+        <p:txBody>
+          <a:bodyPr vert="horz" lIns="91440" tIns="45720" rIns="91440" bIns="45720" rtlCol="0"/>
+          <a:lstStyle>
+            <a:lvl1pPr algn="r">
+              <a:defRPr sz="1200"/>
+            </a:lvl1pPr>
+          </a:lstStyle>
+          <a:p>
+            <a:fld id="{EB6254B8-78B8-46D1-9302-334A225C7F4A}" type="datetimeFigureOut">
+              <a:rPr lang="en-GB" smtClean="0"/>
+              <a:t>17/08/2026</a:t>
+            </a:fld>
+            <a:endParaRPr lang="en-GB"/>
+          </a:p>
+        </p:txBody>
+      </p:sp>
+      <p:sp>
+        <p:nvSpPr>
+          <p:cNvPr id="4" name="Slide Image Placeholder 3"/>
+          <p:cNvSpPr>
+            <a:spLocks noGrp="1" noRot="1" noChangeAspect="1"/>
+          </p:cNvSpPr>
+          <p:nvPr>
+            <p:ph type="sldImg" idx="2"/>
+          </p:nvPr>
+        </p:nvSpPr>
+        <p:spPr>
+          <a:xfrm>
+            <a:off x="685800" y="1143000"/>
+            <a:ext cx="5486400" cy="3086100"/>
+          </a:xfrm>
+          <a:prstGeom prst="rect">
+            <a:avLst/>
+          </a:prstGeom>
+          <a:noFill/>
+          <a:ln w="12700">
+            <a:solidFill>
+              <a:prstClr val="black"/>
+            </a:solidFill>
+          </a:ln>
+        </p:spPr>
+        <p:txBody>
+          <a:bodyPr vert="horz" lIns="91440" tIns="45720" rIns="91440" bIns="45720" rtlCol="0" anchor="ctr"/>
+          <a:lstStyle/>
+          <a:p>
+            <a:endParaRPr lang="en-GB"/>
+          </a:p>
+        </p:txBody>
+      </p:sp>
+      <p:sp>
+        <p:nvSpPr>
+          <p:cNvPr id="5" name="Notes Placeholder 4"/>
+          <p:cNvSpPr>
+            <a:spLocks noGrp="1"/>
+          </p:cNvSpPr>
+          <p:nvPr>
+            <p:ph type="body" sz="quarter" idx="3"/>
+          </p:nvPr>
+        </p:nvSpPr>
+        <p:spPr>
+          <a:xfrm>
+            <a:off x="685800" y="4400550"/>
+            <a:ext cx="5486400" cy="3600450"/>
+          </a:xfrm>
+          <a:prstGeom prst="rect">
+            <a:avLst/>
+          </a:prstGeom>
+        </p:spPr>
+        <p:txBody>
+          <a:bodyPr vert="horz" lIns="91440" tIns="45720" rIns="91440" bIns="45720" rtlCol="0"/>
+          <a:lstStyle/>
+          <a:p>
+            <a:pPr lvl="0"/>
+            <a:r>
+              <a:rPr lang="en-US"/>
+              <a:t>Click to edit Master text styles</a:t>
+            </a:r>
+          </a:p>
+          <a:p>
+            <a:pPr lvl="1"/>
+            <a:r>
+              <a:rPr lang="en-US"/>
+              <a:t>Second level</a:t>
+            </a:r>
+          </a:p>
+          <a:p>
+            <a:pPr lvl="2"/>
+            <a:r>
+              <a:rPr lang="en-US"/>
+              <a:t>Third level</a:t>
+            </a:r>
+          </a:p>
+          <a:p>
+            <a:pPr lvl="3"/>
+            <a:r>
+              <a:rPr lang="en-US"/>
+              <a:t>Fourth level</a:t>
+            </a:r>
+          </a:p>
+          <a:p>
+            <a:pPr lvl="4"/>
+            <a:r>
+              <a:rPr lang="en-US"/>
+              <a:t>Fifth level</a:t>
+            </a:r>
+            <a:endParaRPr lang="en-GB"/>
+          </a:p>
+        </p:txBody>
+      </p:sp>
+      <p:sp>
+        <p:nvSpPr>
+          <p:cNvPr id="6" name="Footer Placeholder 5"/>
+          <p:cNvSpPr>
+            <a:spLocks noGrp="1"/>
+          </p:cNvSpPr>
+          <p:nvPr>
+            <p:ph type="ftr" sz="quarter" idx="4"/>
+          </p:nvPr>
+        </p:nvSpPr>
+        <p:spPr>
+          <a:xfrm>
+            <a:off x="0" y="8685213"/>
+            <a:ext cx="2971800" cy="458787"/>
+          </a:xfrm>
+          <a:prstGeom prst="rect">
+            <a:avLst/>
+          </a:prstGeom>
+        </p:spPr>
+        <p:txBody>
+          <a:bodyPr vert="horz" lIns="91440" tIns="45720" rIns="91440" bIns="45720" rtlCol="0" anchor="b"/>
+          <a:lstStyle>
+            <a:lvl1pPr algn="l">
+              <a:defRPr sz="1200"/>
+            </a:lvl1pPr>
+          </a:lstStyle>
+          <a:p>
+            <a:endParaRPr lang="en-GB"/>
+          </a:p>
+        </p:txBody>
+      </p:sp>
+      <p:sp>
+        <p:nvSpPr>
+          <p:cNvPr id="7" name="Slide Number Placeholder 6"/>
+          <p:cNvSpPr>
+            <a:spLocks noGrp="1"/>
+          </p:cNvSpPr>
+          <p:nvPr>
+            <p:ph type="sldNum" sz="quarter" idx="5"/>
+          </p:nvPr>
+        </p:nvSpPr>
+        <p:spPr>
+          <a:xfrm>
+            <a:off x="3884613" y="8685213"/>
+            <a:ext cx="2971800" cy="458787"/>
+          </a:xfrm>
+          <a:prstGeom prst="rect">
+            <a:avLst/>
+          </a:prstGeom>
+        </p:spPr>
+        <p:txBody>
+          <a:bodyPr vert="horz" lIns="91440" tIns="45720" rIns="91440" bIns="45720" rtlCol="0" anchor="b"/>
+          <a:lstStyle>
+            <a:lvl1pPr algn="r">
+              <a:defRPr sz="1200"/>
+            </a:lvl1pPr>
+          </a:lstStyle>
+          <a:p>
+            <a:fld id="{795672DF-11A1-4EBD-934B-12FD96B82173}" type="slidenum">
+              <a:rPr lang="en-GB" smtClean="0"/>
+              <a:t>‹#›</a:t>
+            </a:fld>
+            <a:endParaRPr lang="en-GB"/>
+          </a:p>
+        </p:txBody>
+      </p:sp>
+    </p:spTree>
+    <p:extLst>
+      <p:ext uri="{BB962C8B-B14F-4D97-AF65-F5344CB8AC3E}">
+        <p14:creationId xmlns:p14="http://schemas.microsoft.com/office/powerpoint/2010/main" val="4215751396"/>
+      </p:ext>
+    </p:extLst>
+  </p:cSld>
+  <p:clrMap bg1="lt1" tx1="dk1" bg2="lt2" tx2="dk2" accent1="accent1" accent2="accent2" accent3="accent3" accent4="accent4" accent5="accent5" accent6="accent6" hlink="hlink" folHlink="folHlink"/>
+  <p:notesStyle>
+    <a:lvl1pPr marL="0" algn="l" defTabSz="914400" rtl="0" eaLnBrk="1" latinLnBrk="0" hangingPunct="1">
+      <a:defRPr sz="1200" kern="1200">
+        <a:solidFill>
+          <a:schemeClr val="tx1"/>
+        </a:solidFill>
+        <a:latin typeface="+mn-lt"/>
+        <a:ea typeface="+mn-ea"/>
+        <a:cs typeface="+mn-cs"/>
+      </a:defRPr>
+    </a:lvl1pPr>
+    <a:lvl2pPr marL="457200" algn="l" defTabSz="914400" rtl="0" eaLnBrk="1" latinLnBrk="0" hangingPunct="1">
+      <a:defRPr sz="1200" kern="1200">
+        <a:solidFill>
+          <a:schemeClr val="tx1"/>
+        </a:solidFill>
+        <a:latin typeface="+mn-lt"/>
+        <a:ea typeface="+mn-ea"/>
+        <a:cs typeface="+mn-cs"/>
+      </a:defRPr>
+    </a:lvl2pPr>
+    <a:lvl3pPr marL="914400" algn="l" defTabSz="914400" rtl="0" eaLnBrk="1" latinLnBrk="0" hangingPunct="1">
+      <a:defRPr sz="1200" kern="1200">
+        <a:solidFill>
+          <a:schemeClr val="tx1"/>
+        </a:solidFill>
+        <a:latin typeface="+mn-lt"/>
+        <a:ea typeface="+mn-ea"/>
+        <a:cs typeface="+mn-cs"/>
+      </a:defRPr>
+    </a:lvl3pPr>
+    <a:lvl4pPr marL="1371600" algn="l" defTabSz="914400" rtl="0" eaLnBrk="1" latinLnBrk="0" hangingPunct="1">
+      <a:defRPr sz="1200" kern="1200">
+        <a:solidFill>
+          <a:schemeClr val="tx1"/>
+        </a:solidFill>
+        <a:latin typeface="+mn-lt"/>
+        <a:ea typeface="+mn-ea"/>
+        <a:cs typeface="+mn-cs"/>
+      </a:defRPr>
+    </a:lvl4pPr>
+    <a:lvl5pPr marL="1828800" algn="l" defTabSz="914400" rtl="0" eaLnBrk="1" latinLnBrk="0" hangingPunct="1">
+      <a:defRPr sz="1200" kern="1200">
+        <a:solidFill>
+          <a:schemeClr val="tx1"/>
+        </a:solidFill>
+        <a:latin typeface="+mn-lt"/>
+        <a:ea typeface="+mn-ea"/>
+        <a:cs typeface="+mn-cs"/>
+      </a:defRPr>
+    </a:lvl5pPr>
+    <a:lvl6pPr marL="2286000" algn="l" defTabSz="914400" rtl="0" eaLnBrk="1" latinLnBrk="0" hangingPunct="1">
+      <a:defRPr sz="1200" kern="1200">
+        <a:solidFill>
+          <a:schemeClr val="tx1"/>
+        </a:solidFill>
+        <a:latin typeface="+mn-lt"/>
+        <a:ea typeface="+mn-ea"/>
+        <a:cs typeface="+mn-cs"/>
+      </a:defRPr>
+    </a:lvl6pPr>
+    <a:lvl7pPr marL="2743200" algn="l" defTabSz="914400" rtl="0" eaLnBrk="1" latinLnBrk="0" hangingPunct="1">
+      <a:defRPr sz="1200" kern="1200">
+        <a:solidFill>
+          <a:schemeClr val="tx1"/>
+        </a:solidFill>
+        <a:latin typeface="+mn-lt"/>
+        <a:ea typeface="+mn-ea"/>
+        <a:cs typeface="+mn-cs"/>
+      </a:defRPr>
+    </a:lvl7pPr>
+    <a:lvl8pPr marL="3200400" algn="l" defTabSz="914400" rtl="0" eaLnBrk="1" latinLnBrk="0" hangingPunct="1">
+      <a:defRPr sz="1200" kern="1200">
+        <a:solidFill>
+          <a:schemeClr val="tx1"/>
+        </a:solidFill>
+        <a:latin typeface="+mn-lt"/>
+        <a:ea typeface="+mn-ea"/>
+        <a:cs typeface="+mn-cs"/>
+      </a:defRPr>
+    </a:lvl8pPr>
+    <a:lvl9pPr marL="3657600" algn="l" defTabSz="914400" rtl="0" eaLnBrk="1" latinLnBrk="0" hangingPunct="1">
+      <a:defRPr sz="1200" kern="1200">
+        <a:solidFill>
+          <a:schemeClr val="tx1"/>
+        </a:solidFill>
+        <a:latin typeface="+mn-lt"/>
+        <a:ea typeface="+mn-ea"/>
+        <a:cs typeface="+mn-cs"/>
+      </a:defRPr>
+    </a:lvl9pPr>
+  </p:notesStyle>
+</p:notesMaster>
+</file>
+
+<file path=ppt/notesSlides/notesSlide1.xml><?xml version="1.0" encoding="utf-8"?>
+<p:notes xmlns:a="http://schemas.openxmlformats.org/drawingml/2006/main" xmlns:r="http://schemas.openxmlformats.org/officeDocument/2006/relationships" xmlns:p="http://schemas.openxmlformats.org/presentationml/2006/main">
+  <p:cSld>
+    <p:spTree>
+      <p:nvGrpSpPr>
+        <p:cNvPr id="1" name=""/>
+        <p:cNvGrpSpPr/>
+        <p:nvPr/>
+      </p:nvGrpSpPr>
+      <p:grpSpPr>
+        <a:xfrm>
+          <a:off x="0" y="0"/>
+          <a:ext cx="0" cy="0"/>
+          <a:chOff x="0" y="0"/>
+          <a:chExt cx="0" cy="0"/>
+        </a:xfrm>
+      </p:grpSpPr>
+      <p:sp>
+        <p:nvSpPr>
+          <p:cNvPr id="2" name="Slide Image Placeholder 1"/>
+          <p:cNvSpPr>
+            <a:spLocks noGrp="1" noRot="1" noChangeAspect="1"/>
+          </p:cNvSpPr>
+          <p:nvPr>
+            <p:ph type="sldImg"/>
+          </p:nvPr>
+        </p:nvSpPr>
+        <p:spPr/>
+      </p:sp>
+      <p:sp>
+        <p:nvSpPr>
+          <p:cNvPr id="3" name="Notes Placeholder 2"/>
+          <p:cNvSpPr>
+            <a:spLocks noGrp="1"/>
+          </p:cNvSpPr>
+          <p:nvPr>
+            <p:ph type="body" idx="1"/>
+          </p:nvPr>
+        </p:nvSpPr>
+        <p:spPr/>
+        <p:txBody>
+          <a:bodyPr/>
+          <a:lstStyle/>
+          <a:p>
+            <a:pPr marL="0" marR="0" lvl="0" indent="0" algn="l" defTabSz="914400" rtl="0" eaLnBrk="1" fontAlgn="auto" latinLnBrk="0" hangingPunct="1">
+              <a:lnSpc>
+                <a:spcPct val="100000"/>
+              </a:lnSpc>
+              <a:spcBef>
+                <a:spcPts val="0"/>
+              </a:spcBef>
+              <a:spcAft>
+                <a:spcPts val="0"/>
+              </a:spcAft>
+              <a:buClrTx/>
+              <a:buSzTx/>
+              <a:buFontTx/>
+              <a:buNone/>
+              <a:tabLst/>
+              <a:defRPr/>
+            </a:pPr>
+            <a:r>
+              <a:rPr lang="en-GB" sz="1200" b="1" i="0" u="none" strike="noStrike" kern="1200" dirty="0">
+                <a:solidFill>
+                  <a:schemeClr val="tx1"/>
+                </a:solidFill>
+                <a:effectLst/>
+                <a:latin typeface="+mn-lt"/>
+                <a:ea typeface="+mn-ea"/>
+                <a:cs typeface="+mn-cs"/>
+              </a:rPr>
+              <a:t>Achieving Data Sovereignty for EU Enterprises Through European Cloud Infrastructure: A Comparative Analysis of Technical Capabilities and Regulatory Compliance</a:t>
+            </a:r>
+            <a:endParaRPr lang="en-GB" b="1" dirty="0">
+              <a:effectLst/>
+            </a:endParaRPr>
+          </a:p>
+        </p:txBody>
+      </p:sp>
+      <p:sp>
+        <p:nvSpPr>
+          <p:cNvPr id="4" name="Slide Number Placeholder 3"/>
+          <p:cNvSpPr>
+            <a:spLocks noGrp="1"/>
+          </p:cNvSpPr>
+          <p:nvPr>
+            <p:ph type="sldNum" sz="quarter" idx="5"/>
+          </p:nvPr>
+        </p:nvSpPr>
+        <p:spPr/>
+        <p:txBody>
+          <a:bodyPr/>
+          <a:lstStyle/>
+          <a:p>
+            <a:fld id="{795672DF-11A1-4EBD-934B-12FD96B82173}" type="slidenum">
+              <a:rPr lang="en-GB" smtClean="0"/>
+              <a:t>1</a:t>
+            </a:fld>
+            <a:endParaRPr lang="en-GB"/>
+          </a:p>
+        </p:txBody>
+      </p:sp>
+    </p:spTree>
+    <p:extLst>
+      <p:ext uri="{BB962C8B-B14F-4D97-AF65-F5344CB8AC3E}">
+        <p14:creationId xmlns:p14="http://schemas.microsoft.com/office/powerpoint/2010/main" val="737272418"/>
+      </p:ext>
+    </p:extLst>
+  </p:cSld>
+  <p:clrMapOvr>
+    <a:masterClrMapping/>
+  </p:clrMapOvr>
+</p:notes>
+</file>
+
+<file path=ppt/notesSlides/notesSlide10.xml><?xml version="1.0" encoding="utf-8"?>
+<p:notes xmlns:a="http://schemas.openxmlformats.org/drawingml/2006/main" xmlns:r="http://schemas.openxmlformats.org/officeDocument/2006/relationships" xmlns:p="http://schemas.openxmlformats.org/presentationml/2006/main">
+  <p:cSld>
+    <p:spTree>
+      <p:nvGrpSpPr>
+        <p:cNvPr id="1" name=""/>
+        <p:cNvGrpSpPr/>
+        <p:nvPr/>
+      </p:nvGrpSpPr>
+      <p:grpSpPr>
+        <a:xfrm>
+          <a:off x="0" y="0"/>
+          <a:ext cx="0" cy="0"/>
+          <a:chOff x="0" y="0"/>
+          <a:chExt cx="0" cy="0"/>
+        </a:xfrm>
+      </p:grpSpPr>
+      <p:sp>
+        <p:nvSpPr>
+          <p:cNvPr id="2" name="Slide Image Placeholder 1"/>
+          <p:cNvSpPr>
+            <a:spLocks noGrp="1" noRot="1" noChangeAspect="1"/>
+          </p:cNvSpPr>
+          <p:nvPr>
+            <p:ph type="sldImg"/>
+          </p:nvPr>
+        </p:nvSpPr>
+        <p:spPr/>
+      </p:sp>
+      <p:sp>
+        <p:nvSpPr>
+          <p:cNvPr id="3" name="Notes Placeholder 2"/>
+          <p:cNvSpPr>
+            <a:spLocks noGrp="1"/>
+          </p:cNvSpPr>
+          <p:nvPr>
+            <p:ph type="body" idx="1"/>
+          </p:nvPr>
+        </p:nvSpPr>
+        <p:spPr/>
+        <p:txBody>
+          <a:bodyPr/>
+          <a:lstStyle/>
+          <a:p>
+            <a:pPr marL="0" marR="0" lvl="0" indent="0" algn="l" defTabSz="914400" rtl="0" eaLnBrk="1" fontAlgn="auto" latinLnBrk="0" hangingPunct="1">
+              <a:lnSpc>
+                <a:spcPct val="100000"/>
+              </a:lnSpc>
+              <a:spcBef>
+                <a:spcPts val="0"/>
+              </a:spcBef>
+              <a:spcAft>
+                <a:spcPts val="0"/>
+              </a:spcAft>
+              <a:buClrTx/>
+              <a:buSzTx/>
+              <a:buFontTx/>
+              <a:buNone/>
+              <a:tabLst/>
+              <a:defRPr/>
+            </a:pPr>
+            <a:r>
+              <a:rPr lang="en-GB" sz="1200" b="1" i="0" u="none" strike="noStrike" kern="1200" dirty="0">
+                <a:solidFill>
+                  <a:schemeClr val="tx1"/>
+                </a:solidFill>
+                <a:effectLst/>
+                <a:latin typeface="+mn-lt"/>
+                <a:ea typeface="+mn-ea"/>
+                <a:cs typeface="+mn-cs"/>
+              </a:rPr>
+              <a:t>Achieving Data Sovereignty for EU Enterprises Through European Cloud Infrastructure: A Comparative Analysis of Technical Capabilities and Regulatory Compliance</a:t>
+            </a:r>
+            <a:endParaRPr lang="en-GB" b="1" dirty="0">
+              <a:effectLst/>
+            </a:endParaRPr>
+          </a:p>
+          <a:p>
+            <a:endParaRPr lang="en-GB" dirty="0"/>
+          </a:p>
+        </p:txBody>
+      </p:sp>
+      <p:sp>
+        <p:nvSpPr>
+          <p:cNvPr id="4" name="Slide Number Placeholder 3"/>
+          <p:cNvSpPr>
+            <a:spLocks noGrp="1"/>
+          </p:cNvSpPr>
+          <p:nvPr>
+            <p:ph type="sldNum" sz="quarter" idx="5"/>
+          </p:nvPr>
+        </p:nvSpPr>
+        <p:spPr/>
+        <p:txBody>
+          <a:bodyPr/>
+          <a:lstStyle/>
+          <a:p>
+            <a:fld id="{795672DF-11A1-4EBD-934B-12FD96B82173}" type="slidenum">
+              <a:rPr lang="en-GB" smtClean="0"/>
+              <a:t>10</a:t>
+            </a:fld>
+            <a:endParaRPr lang="en-GB"/>
+          </a:p>
+        </p:txBody>
+      </p:sp>
+    </p:spTree>
+    <p:extLst>
+      <p:ext uri="{BB962C8B-B14F-4D97-AF65-F5344CB8AC3E}">
+        <p14:creationId xmlns:p14="http://schemas.microsoft.com/office/powerpoint/2010/main" val="2454785523"/>
+      </p:ext>
+    </p:extLst>
+  </p:cSld>
+  <p:clrMapOvr>
+    <a:masterClrMapping/>
+  </p:clrMapOvr>
+</p:notes>
+</file>
+
+<file path=ppt/notesSlides/notesSlide11.xml><?xml version="1.0" encoding="utf-8"?>
+<p:notes xmlns:a="http://schemas.openxmlformats.org/drawingml/2006/main" xmlns:r="http://schemas.openxmlformats.org/officeDocument/2006/relationships" xmlns:p="http://schemas.openxmlformats.org/presentationml/2006/main">
+  <p:cSld>
+    <p:spTree>
+      <p:nvGrpSpPr>
+        <p:cNvPr id="1" name=""/>
+        <p:cNvGrpSpPr/>
+        <p:nvPr/>
+      </p:nvGrpSpPr>
+      <p:grpSpPr>
+        <a:xfrm>
+          <a:off x="0" y="0"/>
+          <a:ext cx="0" cy="0"/>
+          <a:chOff x="0" y="0"/>
+          <a:chExt cx="0" cy="0"/>
+        </a:xfrm>
+      </p:grpSpPr>
+      <p:sp>
+        <p:nvSpPr>
+          <p:cNvPr id="2" name="Slide Image Placeholder 1"/>
+          <p:cNvSpPr>
+            <a:spLocks noGrp="1" noRot="1" noChangeAspect="1"/>
+          </p:cNvSpPr>
+          <p:nvPr>
+            <p:ph type="sldImg"/>
+          </p:nvPr>
+        </p:nvSpPr>
+        <p:spPr/>
+      </p:sp>
+      <p:sp>
+        <p:nvSpPr>
+          <p:cNvPr id="3" name="Notes Placeholder 2"/>
+          <p:cNvSpPr>
+            <a:spLocks noGrp="1"/>
+          </p:cNvSpPr>
+          <p:nvPr>
+            <p:ph type="body" idx="1"/>
+          </p:nvPr>
+        </p:nvSpPr>
+        <p:spPr/>
+        <p:txBody>
+          <a:bodyPr/>
+          <a:lstStyle/>
+          <a:p>
+            <a:pPr marL="0" marR="0" lvl="0" indent="0" algn="l" defTabSz="914400" rtl="0" eaLnBrk="1" fontAlgn="auto" latinLnBrk="0" hangingPunct="1">
+              <a:lnSpc>
+                <a:spcPct val="100000"/>
+              </a:lnSpc>
+              <a:spcBef>
+                <a:spcPts val="0"/>
+              </a:spcBef>
+              <a:spcAft>
+                <a:spcPts val="0"/>
+              </a:spcAft>
+              <a:buClrTx/>
+              <a:buSzTx/>
+              <a:buFontTx/>
+              <a:buNone/>
+              <a:tabLst/>
+              <a:defRPr/>
+            </a:pPr>
+            <a:r>
+              <a:rPr lang="en-GB" sz="1200" b="1" i="0" u="none" strike="noStrike" kern="1200" dirty="0">
+                <a:solidFill>
+                  <a:schemeClr val="tx1"/>
+                </a:solidFill>
+                <a:effectLst/>
+                <a:latin typeface="+mn-lt"/>
+                <a:ea typeface="+mn-ea"/>
+                <a:cs typeface="+mn-cs"/>
+              </a:rPr>
+              <a:t>Achieving Data Sovereignty for EU Enterprises Through European Cloud Infrastructure: A Comparative Analysis of Technical Capabilities and Regulatory Compliance</a:t>
+            </a:r>
+            <a:endParaRPr lang="en-GB" b="1" dirty="0">
+              <a:effectLst/>
+            </a:endParaRPr>
+          </a:p>
+          <a:p>
+            <a:endParaRPr lang="en-GB" dirty="0"/>
+          </a:p>
+        </p:txBody>
+      </p:sp>
+      <p:sp>
+        <p:nvSpPr>
+          <p:cNvPr id="4" name="Slide Number Placeholder 3"/>
+          <p:cNvSpPr>
+            <a:spLocks noGrp="1"/>
+          </p:cNvSpPr>
+          <p:nvPr>
+            <p:ph type="sldNum" sz="quarter" idx="5"/>
+          </p:nvPr>
+        </p:nvSpPr>
+        <p:spPr/>
+        <p:txBody>
+          <a:bodyPr/>
+          <a:lstStyle/>
+          <a:p>
+            <a:fld id="{795672DF-11A1-4EBD-934B-12FD96B82173}" type="slidenum">
+              <a:rPr lang="en-GB" smtClean="0"/>
+              <a:t>11</a:t>
+            </a:fld>
+            <a:endParaRPr lang="en-GB"/>
+          </a:p>
+        </p:txBody>
+      </p:sp>
+    </p:spTree>
+    <p:extLst>
+      <p:ext uri="{BB962C8B-B14F-4D97-AF65-F5344CB8AC3E}">
+        <p14:creationId xmlns:p14="http://schemas.microsoft.com/office/powerpoint/2010/main" val="2665910157"/>
+      </p:ext>
+    </p:extLst>
+  </p:cSld>
+  <p:clrMapOvr>
+    <a:masterClrMapping/>
+  </p:clrMapOvr>
+</p:notes>
+</file>
+
+<file path=ppt/notesSlides/notesSlide12.xml><?xml version="1.0" encoding="utf-8"?>
+<p:notes xmlns:a="http://schemas.openxmlformats.org/drawingml/2006/main" xmlns:r="http://schemas.openxmlformats.org/officeDocument/2006/relationships" xmlns:p="http://schemas.openxmlformats.org/presentationml/2006/main">
+  <p:cSld>
+    <p:spTree>
+      <p:nvGrpSpPr>
+        <p:cNvPr id="1" name=""/>
+        <p:cNvGrpSpPr/>
+        <p:nvPr/>
+      </p:nvGrpSpPr>
+      <p:grpSpPr>
+        <a:xfrm>
+          <a:off x="0" y="0"/>
+          <a:ext cx="0" cy="0"/>
+          <a:chOff x="0" y="0"/>
+          <a:chExt cx="0" cy="0"/>
+        </a:xfrm>
+      </p:grpSpPr>
+      <p:sp>
+        <p:nvSpPr>
+          <p:cNvPr id="2" name="Slide Image Placeholder 1"/>
+          <p:cNvSpPr>
+            <a:spLocks noGrp="1" noRot="1" noChangeAspect="1"/>
+          </p:cNvSpPr>
+          <p:nvPr>
+            <p:ph type="sldImg"/>
+          </p:nvPr>
+        </p:nvSpPr>
+        <p:spPr/>
+      </p:sp>
+      <p:sp>
+        <p:nvSpPr>
+          <p:cNvPr id="3" name="Notes Placeholder 2"/>
+          <p:cNvSpPr>
+            <a:spLocks noGrp="1"/>
+          </p:cNvSpPr>
+          <p:nvPr>
+            <p:ph type="body" idx="1"/>
+          </p:nvPr>
+        </p:nvSpPr>
+        <p:spPr/>
+        <p:txBody>
+          <a:bodyPr/>
+          <a:lstStyle/>
+          <a:p>
+            <a:pPr marL="0" marR="0" lvl="0" indent="0" algn="l" defTabSz="914400" rtl="0" eaLnBrk="1" fontAlgn="auto" latinLnBrk="0" hangingPunct="1">
+              <a:lnSpc>
+                <a:spcPct val="100000"/>
+              </a:lnSpc>
+              <a:spcBef>
+                <a:spcPts val="0"/>
+              </a:spcBef>
+              <a:spcAft>
+                <a:spcPts val="0"/>
+              </a:spcAft>
+              <a:buClrTx/>
+              <a:buSzTx/>
+              <a:buFontTx/>
+              <a:buNone/>
+              <a:tabLst/>
+              <a:defRPr/>
+            </a:pPr>
+            <a:r>
+              <a:rPr lang="en-GB" sz="1200" b="1" i="0" u="none" strike="noStrike" kern="1200" dirty="0">
+                <a:solidFill>
+                  <a:schemeClr val="tx1"/>
+                </a:solidFill>
+                <a:effectLst/>
+                <a:latin typeface="+mn-lt"/>
+                <a:ea typeface="+mn-ea"/>
+                <a:cs typeface="+mn-cs"/>
+              </a:rPr>
+              <a:t>Achieving Data Sovereignty for EU Enterprises Through European Cloud Infrastructure: A Comparative Analysis of Technical Capabilities and Regulatory Compliance</a:t>
+            </a:r>
+            <a:endParaRPr lang="en-GB" b="1" dirty="0">
+              <a:effectLst/>
+            </a:endParaRPr>
+          </a:p>
+          <a:p>
+            <a:endParaRPr lang="en-GB" dirty="0"/>
+          </a:p>
+        </p:txBody>
+      </p:sp>
+      <p:sp>
+        <p:nvSpPr>
+          <p:cNvPr id="4" name="Slide Number Placeholder 3"/>
+          <p:cNvSpPr>
+            <a:spLocks noGrp="1"/>
+          </p:cNvSpPr>
+          <p:nvPr>
+            <p:ph type="sldNum" sz="quarter" idx="5"/>
+          </p:nvPr>
+        </p:nvSpPr>
+        <p:spPr/>
+        <p:txBody>
+          <a:bodyPr/>
+          <a:lstStyle/>
+          <a:p>
+            <a:fld id="{795672DF-11A1-4EBD-934B-12FD96B82173}" type="slidenum">
+              <a:rPr lang="en-GB" smtClean="0"/>
+              <a:t>12</a:t>
+            </a:fld>
+            <a:endParaRPr lang="en-GB"/>
+          </a:p>
+        </p:txBody>
+      </p:sp>
+    </p:spTree>
+    <p:extLst>
+      <p:ext uri="{BB962C8B-B14F-4D97-AF65-F5344CB8AC3E}">
+        <p14:creationId xmlns:p14="http://schemas.microsoft.com/office/powerpoint/2010/main" val="233973352"/>
+      </p:ext>
+    </p:extLst>
+  </p:cSld>
+  <p:clrMapOvr>
+    <a:masterClrMapping/>
+  </p:clrMapOvr>
+</p:notes>
+</file>
+
+<file path=ppt/notesSlides/notesSlide13.xml><?xml version="1.0" encoding="utf-8"?>
+<p:notes xmlns:a="http://schemas.openxmlformats.org/drawingml/2006/main" xmlns:r="http://schemas.openxmlformats.org/officeDocument/2006/relationships" xmlns:p="http://schemas.openxmlformats.org/presentationml/2006/main">
+  <p:cSld>
+    <p:spTree>
+      <p:nvGrpSpPr>
+        <p:cNvPr id="1" name=""/>
+        <p:cNvGrpSpPr/>
+        <p:nvPr/>
+      </p:nvGrpSpPr>
+      <p:grpSpPr>
+        <a:xfrm>
+          <a:off x="0" y="0"/>
+          <a:ext cx="0" cy="0"/>
+          <a:chOff x="0" y="0"/>
+          <a:chExt cx="0" cy="0"/>
+        </a:xfrm>
+      </p:grpSpPr>
+      <p:sp>
+        <p:nvSpPr>
+          <p:cNvPr id="2" name="Slide Image Placeholder 1"/>
+          <p:cNvSpPr>
+            <a:spLocks noGrp="1" noRot="1" noChangeAspect="1"/>
+          </p:cNvSpPr>
+          <p:nvPr>
+            <p:ph type="sldImg"/>
+          </p:nvPr>
+        </p:nvSpPr>
+        <p:spPr/>
+      </p:sp>
+      <p:sp>
+        <p:nvSpPr>
+          <p:cNvPr id="3" name="Notes Placeholder 2"/>
+          <p:cNvSpPr>
+            <a:spLocks noGrp="1"/>
+          </p:cNvSpPr>
+          <p:nvPr>
+            <p:ph type="body" idx="1"/>
+          </p:nvPr>
+        </p:nvSpPr>
+        <p:spPr/>
+        <p:txBody>
+          <a:bodyPr/>
+          <a:lstStyle/>
+          <a:p>
+            <a:pPr marL="0" marR="0" lvl="0" indent="0" algn="l" defTabSz="914400" rtl="0" eaLnBrk="1" fontAlgn="auto" latinLnBrk="0" hangingPunct="1">
+              <a:lnSpc>
+                <a:spcPct val="100000"/>
+              </a:lnSpc>
+              <a:spcBef>
+                <a:spcPts val="0"/>
+              </a:spcBef>
+              <a:spcAft>
+                <a:spcPts val="0"/>
+              </a:spcAft>
+              <a:buClrTx/>
+              <a:buSzTx/>
+              <a:buFontTx/>
+              <a:buNone/>
+              <a:tabLst/>
+              <a:defRPr/>
+            </a:pPr>
+            <a:r>
+              <a:rPr lang="en-GB" sz="1200" b="1" i="0" u="none" strike="noStrike" kern="1200" dirty="0">
+                <a:solidFill>
+                  <a:schemeClr val="tx1"/>
+                </a:solidFill>
+                <a:effectLst/>
+                <a:latin typeface="+mn-lt"/>
+                <a:ea typeface="+mn-ea"/>
+                <a:cs typeface="+mn-cs"/>
+              </a:rPr>
+              <a:t>Achieving Data Sovereignty for EU Enterprises Through European Cloud Infrastructure: A Comparative Analysis of Technical Capabilities and Regulatory Compliance</a:t>
+            </a:r>
+            <a:endParaRPr lang="en-GB" b="1" dirty="0">
+              <a:effectLst/>
+            </a:endParaRPr>
+          </a:p>
+          <a:p>
+            <a:endParaRPr lang="en-GB" dirty="0"/>
+          </a:p>
+        </p:txBody>
+      </p:sp>
+      <p:sp>
+        <p:nvSpPr>
+          <p:cNvPr id="4" name="Slide Number Placeholder 3"/>
+          <p:cNvSpPr>
+            <a:spLocks noGrp="1"/>
+          </p:cNvSpPr>
+          <p:nvPr>
+            <p:ph type="sldNum" sz="quarter" idx="5"/>
+          </p:nvPr>
+        </p:nvSpPr>
+        <p:spPr/>
+        <p:txBody>
+          <a:bodyPr/>
+          <a:lstStyle/>
+          <a:p>
+            <a:fld id="{795672DF-11A1-4EBD-934B-12FD96B82173}" type="slidenum">
+              <a:rPr lang="en-GB" smtClean="0"/>
+              <a:t>13</a:t>
+            </a:fld>
+            <a:endParaRPr lang="en-GB"/>
+          </a:p>
+        </p:txBody>
+      </p:sp>
+    </p:spTree>
+    <p:extLst>
+      <p:ext uri="{BB962C8B-B14F-4D97-AF65-F5344CB8AC3E}">
+        <p14:creationId xmlns:p14="http://schemas.microsoft.com/office/powerpoint/2010/main" val="3497617697"/>
+      </p:ext>
+    </p:extLst>
+  </p:cSld>
+  <p:clrMapOvr>
+    <a:masterClrMapping/>
+  </p:clrMapOvr>
+</p:notes>
+</file>
+
+<file path=ppt/notesSlides/notesSlide14.xml><?xml version="1.0" encoding="utf-8"?>
+<p:notes xmlns:a="http://schemas.openxmlformats.org/drawingml/2006/main" xmlns:r="http://schemas.openxmlformats.org/officeDocument/2006/relationships" xmlns:p="http://schemas.openxmlformats.org/presentationml/2006/main">
+  <p:cSld>
+    <p:spTree>
+      <p:nvGrpSpPr>
+        <p:cNvPr id="1" name=""/>
+        <p:cNvGrpSpPr/>
+        <p:nvPr/>
+      </p:nvGrpSpPr>
+      <p:grpSpPr>
+        <a:xfrm>
+          <a:off x="0" y="0"/>
+          <a:ext cx="0" cy="0"/>
+          <a:chOff x="0" y="0"/>
+          <a:chExt cx="0" cy="0"/>
+        </a:xfrm>
+      </p:grpSpPr>
+      <p:sp>
+        <p:nvSpPr>
+          <p:cNvPr id="2" name="Slide Image Placeholder 1"/>
+          <p:cNvSpPr>
+            <a:spLocks noGrp="1" noRot="1" noChangeAspect="1"/>
+          </p:cNvSpPr>
+          <p:nvPr>
+            <p:ph type="sldImg"/>
+          </p:nvPr>
+        </p:nvSpPr>
+        <p:spPr/>
+      </p:sp>
+      <p:sp>
+        <p:nvSpPr>
+          <p:cNvPr id="3" name="Notes Placeholder 2"/>
+          <p:cNvSpPr>
+            <a:spLocks noGrp="1"/>
+          </p:cNvSpPr>
+          <p:nvPr>
+            <p:ph type="body" idx="1"/>
+          </p:nvPr>
+        </p:nvSpPr>
+        <p:spPr/>
+        <p:txBody>
+          <a:bodyPr/>
+          <a:lstStyle/>
+          <a:p>
+            <a:pPr marL="0" marR="0" lvl="0" indent="0" algn="l" defTabSz="914400" rtl="0" eaLnBrk="1" fontAlgn="auto" latinLnBrk="0" hangingPunct="1">
+              <a:lnSpc>
+                <a:spcPct val="100000"/>
+              </a:lnSpc>
+              <a:spcBef>
+                <a:spcPts val="0"/>
+              </a:spcBef>
+              <a:spcAft>
+                <a:spcPts val="0"/>
+              </a:spcAft>
+              <a:buClrTx/>
+              <a:buSzTx/>
+              <a:buFontTx/>
+              <a:buNone/>
+              <a:tabLst/>
+              <a:defRPr/>
+            </a:pPr>
+            <a:r>
+              <a:rPr lang="en-GB" sz="1200" b="1" i="0" u="none" strike="noStrike" kern="1200" dirty="0">
+                <a:solidFill>
+                  <a:schemeClr val="tx1"/>
+                </a:solidFill>
+                <a:effectLst/>
+                <a:latin typeface="+mn-lt"/>
+                <a:ea typeface="+mn-ea"/>
+                <a:cs typeface="+mn-cs"/>
+              </a:rPr>
+              <a:t>Achieving Data Sovereignty for EU Enterprises Through European Cloud Infrastructure: A Comparative Analysis of Technical Capabilities and Regulatory Compliance</a:t>
+            </a:r>
+            <a:endParaRPr lang="en-GB" b="1" dirty="0">
+              <a:effectLst/>
+            </a:endParaRPr>
+          </a:p>
+          <a:p>
+            <a:endParaRPr lang="en-GB" dirty="0"/>
+          </a:p>
+        </p:txBody>
+      </p:sp>
+      <p:sp>
+        <p:nvSpPr>
+          <p:cNvPr id="4" name="Slide Number Placeholder 3"/>
+          <p:cNvSpPr>
+            <a:spLocks noGrp="1"/>
+          </p:cNvSpPr>
+          <p:nvPr>
+            <p:ph type="sldNum" sz="quarter" idx="5"/>
+          </p:nvPr>
+        </p:nvSpPr>
+        <p:spPr/>
+        <p:txBody>
+          <a:bodyPr/>
+          <a:lstStyle/>
+          <a:p>
+            <a:fld id="{795672DF-11A1-4EBD-934B-12FD96B82173}" type="slidenum">
+              <a:rPr lang="en-GB" smtClean="0"/>
+              <a:t>14</a:t>
+            </a:fld>
+            <a:endParaRPr lang="en-GB"/>
+          </a:p>
+        </p:txBody>
+      </p:sp>
+    </p:spTree>
+    <p:extLst>
+      <p:ext uri="{BB962C8B-B14F-4D97-AF65-F5344CB8AC3E}">
+        <p14:creationId xmlns:p14="http://schemas.microsoft.com/office/powerpoint/2010/main" val="487132383"/>
+      </p:ext>
+    </p:extLst>
+  </p:cSld>
+  <p:clrMapOvr>
+    <a:masterClrMapping/>
+  </p:clrMapOvr>
+</p:notes>
+</file>
+
+<file path=ppt/notesSlides/notesSlide15.xml><?xml version="1.0" encoding="utf-8"?>
+<p:notes xmlns:a="http://schemas.openxmlformats.org/drawingml/2006/main" xmlns:r="http://schemas.openxmlformats.org/officeDocument/2006/relationships" xmlns:p="http://schemas.openxmlformats.org/presentationml/2006/main">
+  <p:cSld>
+    <p:spTree>
+      <p:nvGrpSpPr>
+        <p:cNvPr id="1" name=""/>
+        <p:cNvGrpSpPr/>
+        <p:nvPr/>
+      </p:nvGrpSpPr>
+      <p:grpSpPr>
+        <a:xfrm>
+          <a:off x="0" y="0"/>
+          <a:ext cx="0" cy="0"/>
+          <a:chOff x="0" y="0"/>
+          <a:chExt cx="0" cy="0"/>
+        </a:xfrm>
+      </p:grpSpPr>
+      <p:sp>
+        <p:nvSpPr>
+          <p:cNvPr id="2" name="Slide Image Placeholder 1"/>
+          <p:cNvSpPr>
+            <a:spLocks noGrp="1" noRot="1" noChangeAspect="1"/>
+          </p:cNvSpPr>
+          <p:nvPr>
+            <p:ph type="sldImg"/>
+          </p:nvPr>
+        </p:nvSpPr>
+        <p:spPr/>
+      </p:sp>
+      <p:sp>
+        <p:nvSpPr>
+          <p:cNvPr id="3" name="Notes Placeholder 2"/>
+          <p:cNvSpPr>
+            <a:spLocks noGrp="1"/>
+          </p:cNvSpPr>
+          <p:nvPr>
+            <p:ph type="body" idx="1"/>
+          </p:nvPr>
+        </p:nvSpPr>
+        <p:spPr/>
+        <p:txBody>
+          <a:bodyPr/>
+          <a:lstStyle/>
+          <a:p>
+            <a:pPr marL="0" marR="0" lvl="0" indent="0" algn="l" defTabSz="914400" rtl="0" eaLnBrk="1" fontAlgn="auto" latinLnBrk="0" hangingPunct="1">
+              <a:lnSpc>
+                <a:spcPct val="100000"/>
+              </a:lnSpc>
+              <a:spcBef>
+                <a:spcPts val="0"/>
+              </a:spcBef>
+              <a:spcAft>
+                <a:spcPts val="0"/>
+              </a:spcAft>
+              <a:buClrTx/>
+              <a:buSzTx/>
+              <a:buFontTx/>
+              <a:buNone/>
+              <a:tabLst/>
+              <a:defRPr/>
+            </a:pPr>
+            <a:r>
+              <a:rPr lang="en-GB" sz="1200" b="1" i="0" u="none" strike="noStrike" kern="1200" dirty="0">
+                <a:solidFill>
+                  <a:schemeClr val="tx1"/>
+                </a:solidFill>
+                <a:effectLst/>
+                <a:latin typeface="+mn-lt"/>
+                <a:ea typeface="+mn-ea"/>
+                <a:cs typeface="+mn-cs"/>
+              </a:rPr>
+              <a:t>Achieving Data Sovereignty for EU Enterprises Through European Cloud Infrastructure: A Comparative Analysis of Technical Capabilities and Regulatory Compliance</a:t>
+            </a:r>
+            <a:endParaRPr lang="en-GB" b="1" dirty="0">
+              <a:effectLst/>
+            </a:endParaRPr>
+          </a:p>
+          <a:p>
+            <a:endParaRPr lang="en-GB" dirty="0"/>
+          </a:p>
+        </p:txBody>
+      </p:sp>
+      <p:sp>
+        <p:nvSpPr>
+          <p:cNvPr id="4" name="Slide Number Placeholder 3"/>
+          <p:cNvSpPr>
+            <a:spLocks noGrp="1"/>
+          </p:cNvSpPr>
+          <p:nvPr>
+            <p:ph type="sldNum" sz="quarter" idx="5"/>
+          </p:nvPr>
+        </p:nvSpPr>
+        <p:spPr/>
+        <p:txBody>
+          <a:bodyPr/>
+          <a:lstStyle/>
+          <a:p>
+            <a:fld id="{795672DF-11A1-4EBD-934B-12FD96B82173}" type="slidenum">
+              <a:rPr lang="en-GB" smtClean="0"/>
+              <a:t>15</a:t>
+            </a:fld>
+            <a:endParaRPr lang="en-GB"/>
+          </a:p>
+        </p:txBody>
+      </p:sp>
+    </p:spTree>
+    <p:extLst>
+      <p:ext uri="{BB962C8B-B14F-4D97-AF65-F5344CB8AC3E}">
+        <p14:creationId xmlns:p14="http://schemas.microsoft.com/office/powerpoint/2010/main" val="2469175597"/>
+      </p:ext>
+    </p:extLst>
+  </p:cSld>
+  <p:clrMapOvr>
+    <a:masterClrMapping/>
+  </p:clrMapOvr>
+</p:notes>
+</file>
+
+<file path=ppt/notesSlides/notesSlide16.xml><?xml version="1.0" encoding="utf-8"?>
+<p:notes xmlns:a="http://schemas.openxmlformats.org/drawingml/2006/main" xmlns:r="http://schemas.openxmlformats.org/officeDocument/2006/relationships" xmlns:p="http://schemas.openxmlformats.org/presentationml/2006/main">
+  <p:cSld>
+    <p:spTree>
+      <p:nvGrpSpPr>
+        <p:cNvPr id="1" name=""/>
+        <p:cNvGrpSpPr/>
+        <p:nvPr/>
+      </p:nvGrpSpPr>
+      <p:grpSpPr>
+        <a:xfrm>
+          <a:off x="0" y="0"/>
+          <a:ext cx="0" cy="0"/>
+          <a:chOff x="0" y="0"/>
+          <a:chExt cx="0" cy="0"/>
+        </a:xfrm>
+      </p:grpSpPr>
+      <p:sp>
+        <p:nvSpPr>
+          <p:cNvPr id="2" name="Slide Image Placeholder 1"/>
+          <p:cNvSpPr>
+            <a:spLocks noGrp="1" noRot="1" noChangeAspect="1"/>
+          </p:cNvSpPr>
+          <p:nvPr>
+            <p:ph type="sldImg"/>
+          </p:nvPr>
+        </p:nvSpPr>
+        <p:spPr/>
+      </p:sp>
+      <p:sp>
+        <p:nvSpPr>
+          <p:cNvPr id="3" name="Notes Placeholder 2"/>
+          <p:cNvSpPr>
+            <a:spLocks noGrp="1"/>
+          </p:cNvSpPr>
+          <p:nvPr>
+            <p:ph type="body" idx="1"/>
+          </p:nvPr>
+        </p:nvSpPr>
+        <p:spPr/>
+        <p:txBody>
+          <a:bodyPr/>
+          <a:lstStyle/>
+          <a:p>
+            <a:pPr marL="0" marR="0" lvl="0" indent="0" algn="l" defTabSz="914400" rtl="0" eaLnBrk="1" fontAlgn="auto" latinLnBrk="0" hangingPunct="1">
+              <a:lnSpc>
+                <a:spcPct val="100000"/>
+              </a:lnSpc>
+              <a:spcBef>
+                <a:spcPts val="0"/>
+              </a:spcBef>
+              <a:spcAft>
+                <a:spcPts val="0"/>
+              </a:spcAft>
+              <a:buClrTx/>
+              <a:buSzTx/>
+              <a:buFontTx/>
+              <a:buNone/>
+              <a:tabLst/>
+              <a:defRPr/>
+            </a:pPr>
+            <a:r>
+              <a:rPr lang="en-GB" sz="1200" b="1" i="0" u="none" strike="noStrike" kern="1200" dirty="0">
+                <a:solidFill>
+                  <a:schemeClr val="tx1"/>
+                </a:solidFill>
+                <a:effectLst/>
+                <a:latin typeface="+mn-lt"/>
+                <a:ea typeface="+mn-ea"/>
+                <a:cs typeface="+mn-cs"/>
+              </a:rPr>
+              <a:t>Achieving Data Sovereignty for EU Enterprises Through European Cloud Infrastructure: A Comparative Analysis of Technical Capabilities and Regulatory Compliance</a:t>
+            </a:r>
+            <a:endParaRPr lang="en-GB" b="1" dirty="0">
+              <a:effectLst/>
+            </a:endParaRPr>
+          </a:p>
+          <a:p>
+            <a:endParaRPr lang="en-GB" dirty="0"/>
+          </a:p>
+        </p:txBody>
+      </p:sp>
+      <p:sp>
+        <p:nvSpPr>
+          <p:cNvPr id="4" name="Slide Number Placeholder 3"/>
+          <p:cNvSpPr>
+            <a:spLocks noGrp="1"/>
+          </p:cNvSpPr>
+          <p:nvPr>
+            <p:ph type="sldNum" sz="quarter" idx="5"/>
+          </p:nvPr>
+        </p:nvSpPr>
+        <p:spPr/>
+        <p:txBody>
+          <a:bodyPr/>
+          <a:lstStyle/>
+          <a:p>
+            <a:fld id="{795672DF-11A1-4EBD-934B-12FD96B82173}" type="slidenum">
+              <a:rPr lang="en-GB" smtClean="0"/>
+              <a:t>16</a:t>
+            </a:fld>
+            <a:endParaRPr lang="en-GB"/>
+          </a:p>
+        </p:txBody>
+      </p:sp>
+    </p:spTree>
+    <p:extLst>
+      <p:ext uri="{BB962C8B-B14F-4D97-AF65-F5344CB8AC3E}">
+        <p14:creationId xmlns:p14="http://schemas.microsoft.com/office/powerpoint/2010/main" val="3124210397"/>
+      </p:ext>
+    </p:extLst>
+  </p:cSld>
+  <p:clrMapOvr>
+    <a:masterClrMapping/>
+  </p:clrMapOvr>
+</p:notes>
+</file>
+
+<file path=ppt/notesSlides/notesSlide17.xml><?xml version="1.0" encoding="utf-8"?>
+<p:notes xmlns:a="http://schemas.openxmlformats.org/drawingml/2006/main" xmlns:r="http://schemas.openxmlformats.org/officeDocument/2006/relationships" xmlns:p="http://schemas.openxmlformats.org/presentationml/2006/main">
+  <p:cSld>
+    <p:spTree>
+      <p:nvGrpSpPr>
+        <p:cNvPr id="1" name=""/>
+        <p:cNvGrpSpPr/>
+        <p:nvPr/>
+      </p:nvGrpSpPr>
+      <p:grpSpPr>
+        <a:xfrm>
+          <a:off x="0" y="0"/>
+          <a:ext cx="0" cy="0"/>
+          <a:chOff x="0" y="0"/>
+          <a:chExt cx="0" cy="0"/>
+        </a:xfrm>
+      </p:grpSpPr>
+      <p:sp>
+        <p:nvSpPr>
+          <p:cNvPr id="2" name="Slide Image Placeholder 1"/>
+          <p:cNvSpPr>
+            <a:spLocks noGrp="1" noRot="1" noChangeAspect="1"/>
+          </p:cNvSpPr>
+          <p:nvPr>
+            <p:ph type="sldImg"/>
+          </p:nvPr>
+        </p:nvSpPr>
+        <p:spPr/>
+      </p:sp>
+      <p:sp>
+        <p:nvSpPr>
+          <p:cNvPr id="3" name="Notes Placeholder 2"/>
+          <p:cNvSpPr>
+            <a:spLocks noGrp="1"/>
+          </p:cNvSpPr>
+          <p:nvPr>
+            <p:ph type="body" idx="1"/>
+          </p:nvPr>
+        </p:nvSpPr>
+        <p:spPr/>
+        <p:txBody>
+          <a:bodyPr/>
+          <a:lstStyle/>
+          <a:p>
+            <a:pPr marL="0" marR="0" lvl="0" indent="0" algn="l" defTabSz="914400" rtl="0" eaLnBrk="1" fontAlgn="auto" latinLnBrk="0" hangingPunct="1">
+              <a:lnSpc>
+                <a:spcPct val="100000"/>
+              </a:lnSpc>
+              <a:spcBef>
+                <a:spcPts val="0"/>
+              </a:spcBef>
+              <a:spcAft>
+                <a:spcPts val="0"/>
+              </a:spcAft>
+              <a:buClrTx/>
+              <a:buSzTx/>
+              <a:buFontTx/>
+              <a:buNone/>
+              <a:tabLst/>
+              <a:defRPr/>
+            </a:pPr>
+            <a:r>
+              <a:rPr lang="en-GB" sz="1200" b="1" i="0" u="none" strike="noStrike" kern="1200" dirty="0">
+                <a:solidFill>
+                  <a:schemeClr val="tx1"/>
+                </a:solidFill>
+                <a:effectLst/>
+                <a:latin typeface="+mn-lt"/>
+                <a:ea typeface="+mn-ea"/>
+                <a:cs typeface="+mn-cs"/>
+              </a:rPr>
+              <a:t>Achieving Data Sovereignty for EU Enterprises Through European Cloud Infrastructure: A Comparative Analysis of Technical Capabilities and Regulatory Compliance</a:t>
+            </a:r>
+            <a:endParaRPr lang="en-GB" b="1" dirty="0">
+              <a:effectLst/>
+            </a:endParaRPr>
+          </a:p>
+          <a:p>
+            <a:endParaRPr lang="en-GB" dirty="0"/>
+          </a:p>
+        </p:txBody>
+      </p:sp>
+      <p:sp>
+        <p:nvSpPr>
+          <p:cNvPr id="4" name="Slide Number Placeholder 3"/>
+          <p:cNvSpPr>
+            <a:spLocks noGrp="1"/>
+          </p:cNvSpPr>
+          <p:nvPr>
+            <p:ph type="sldNum" sz="quarter" idx="5"/>
+          </p:nvPr>
+        </p:nvSpPr>
+        <p:spPr/>
+        <p:txBody>
+          <a:bodyPr/>
+          <a:lstStyle/>
+          <a:p>
+            <a:fld id="{795672DF-11A1-4EBD-934B-12FD96B82173}" type="slidenum">
+              <a:rPr lang="en-GB" smtClean="0"/>
+              <a:t>17</a:t>
+            </a:fld>
+            <a:endParaRPr lang="en-GB"/>
+          </a:p>
+        </p:txBody>
+      </p:sp>
+    </p:spTree>
+    <p:extLst>
+      <p:ext uri="{BB962C8B-B14F-4D97-AF65-F5344CB8AC3E}">
+        <p14:creationId xmlns:p14="http://schemas.microsoft.com/office/powerpoint/2010/main" val="850574699"/>
+      </p:ext>
+    </p:extLst>
+  </p:cSld>
+  <p:clrMapOvr>
+    <a:masterClrMapping/>
+  </p:clrMapOvr>
+</p:notes>
+</file>
+
+<file path=ppt/notesSlides/notesSlide18.xml><?xml version="1.0" encoding="utf-8"?>
+<p:notes xmlns:a="http://schemas.openxmlformats.org/drawingml/2006/main" xmlns:r="http://schemas.openxmlformats.org/officeDocument/2006/relationships" xmlns:p="http://schemas.openxmlformats.org/presentationml/2006/main">
+  <p:cSld>
+    <p:spTree>
+      <p:nvGrpSpPr>
+        <p:cNvPr id="1" name=""/>
+        <p:cNvGrpSpPr/>
+        <p:nvPr/>
+      </p:nvGrpSpPr>
+      <p:grpSpPr>
+        <a:xfrm>
+          <a:off x="0" y="0"/>
+          <a:ext cx="0" cy="0"/>
+          <a:chOff x="0" y="0"/>
+          <a:chExt cx="0" cy="0"/>
+        </a:xfrm>
+      </p:grpSpPr>
+      <p:sp>
+        <p:nvSpPr>
+          <p:cNvPr id="2" name="Slide Image Placeholder 1"/>
+          <p:cNvSpPr>
+            <a:spLocks noGrp="1" noRot="1" noChangeAspect="1"/>
+          </p:cNvSpPr>
+          <p:nvPr>
+            <p:ph type="sldImg"/>
+          </p:nvPr>
+        </p:nvSpPr>
+        <p:spPr/>
+      </p:sp>
+      <p:sp>
+        <p:nvSpPr>
+          <p:cNvPr id="3" name="Notes Placeholder 2"/>
+          <p:cNvSpPr>
+            <a:spLocks noGrp="1"/>
+          </p:cNvSpPr>
+          <p:nvPr>
+            <p:ph type="body" idx="1"/>
+          </p:nvPr>
+        </p:nvSpPr>
+        <p:spPr/>
+        <p:txBody>
+          <a:bodyPr/>
+          <a:lstStyle/>
+          <a:p>
+            <a:pPr marL="0" marR="0" lvl="0" indent="0" algn="l" defTabSz="914400" rtl="0" eaLnBrk="1" fontAlgn="auto" latinLnBrk="0" hangingPunct="1">
+              <a:lnSpc>
+                <a:spcPct val="100000"/>
+              </a:lnSpc>
+              <a:spcBef>
+                <a:spcPts val="0"/>
+              </a:spcBef>
+              <a:spcAft>
+                <a:spcPts val="0"/>
+              </a:spcAft>
+              <a:buClrTx/>
+              <a:buSzTx/>
+              <a:buFontTx/>
+              <a:buNone/>
+              <a:tabLst/>
+              <a:defRPr/>
+            </a:pPr>
+            <a:r>
+              <a:rPr lang="en-GB" sz="1200" b="1" i="0" u="none" strike="noStrike" kern="1200" dirty="0">
+                <a:solidFill>
+                  <a:schemeClr val="tx1"/>
+                </a:solidFill>
+                <a:effectLst/>
+                <a:latin typeface="+mn-lt"/>
+                <a:ea typeface="+mn-ea"/>
+                <a:cs typeface="+mn-cs"/>
+              </a:rPr>
+              <a:t>Achieving Data Sovereignty for EU Enterprises Through European Cloud Infrastructure: A Comparative Analysis of Technical Capabilities and Regulatory Compliance</a:t>
+            </a:r>
+            <a:endParaRPr lang="en-GB" b="1" dirty="0">
+              <a:effectLst/>
+            </a:endParaRPr>
+          </a:p>
+          <a:p>
+            <a:endParaRPr lang="en-GB" dirty="0"/>
+          </a:p>
+        </p:txBody>
+      </p:sp>
+      <p:sp>
+        <p:nvSpPr>
+          <p:cNvPr id="4" name="Slide Number Placeholder 3"/>
+          <p:cNvSpPr>
+            <a:spLocks noGrp="1"/>
+          </p:cNvSpPr>
+          <p:nvPr>
+            <p:ph type="sldNum" sz="quarter" idx="5"/>
+          </p:nvPr>
+        </p:nvSpPr>
+        <p:spPr/>
+        <p:txBody>
+          <a:bodyPr/>
+          <a:lstStyle/>
+          <a:p>
+            <a:fld id="{795672DF-11A1-4EBD-934B-12FD96B82173}" type="slidenum">
+              <a:rPr lang="en-GB" smtClean="0"/>
+              <a:t>18</a:t>
+            </a:fld>
+            <a:endParaRPr lang="en-GB"/>
+          </a:p>
+        </p:txBody>
+      </p:sp>
+    </p:spTree>
+    <p:extLst>
+      <p:ext uri="{BB962C8B-B14F-4D97-AF65-F5344CB8AC3E}">
+        <p14:creationId xmlns:p14="http://schemas.microsoft.com/office/powerpoint/2010/main" val="1763806828"/>
+      </p:ext>
+    </p:extLst>
+  </p:cSld>
+  <p:clrMapOvr>
+    <a:masterClrMapping/>
+  </p:clrMapOvr>
+</p:notes>
+</file>
+
+<file path=ppt/notesSlides/notesSlide2.xml><?xml version="1.0" encoding="utf-8"?>
+<p:notes xmlns:a="http://schemas.openxmlformats.org/drawingml/2006/main" xmlns:r="http://schemas.openxmlformats.org/officeDocument/2006/relationships" xmlns:p="http://schemas.openxmlformats.org/presentationml/2006/main">
+  <p:cSld>
+    <p:spTree>
+      <p:nvGrpSpPr>
+        <p:cNvPr id="1" name=""/>
+        <p:cNvGrpSpPr/>
+        <p:nvPr/>
+      </p:nvGrpSpPr>
+      <p:grpSpPr>
+        <a:xfrm>
+          <a:off x="0" y="0"/>
+          <a:ext cx="0" cy="0"/>
+          <a:chOff x="0" y="0"/>
+          <a:chExt cx="0" cy="0"/>
+        </a:xfrm>
+      </p:grpSpPr>
+      <p:sp>
+        <p:nvSpPr>
+          <p:cNvPr id="2" name="Slide Image Placeholder 1"/>
+          <p:cNvSpPr>
+            <a:spLocks noGrp="1" noRot="1" noChangeAspect="1"/>
+          </p:cNvSpPr>
+          <p:nvPr>
+            <p:ph type="sldImg"/>
+          </p:nvPr>
+        </p:nvSpPr>
+        <p:spPr/>
+      </p:sp>
+      <p:sp>
+        <p:nvSpPr>
+          <p:cNvPr id="3" name="Notes Placeholder 2"/>
+          <p:cNvSpPr>
+            <a:spLocks noGrp="1"/>
+          </p:cNvSpPr>
+          <p:nvPr>
+            <p:ph type="body" idx="1"/>
+          </p:nvPr>
+        </p:nvSpPr>
+        <p:spPr/>
+        <p:txBody>
+          <a:bodyPr/>
+          <a:lstStyle/>
+          <a:p>
+            <a:pPr marL="0" marR="0" lvl="0" indent="0" algn="l" defTabSz="914400" rtl="0" eaLnBrk="1" fontAlgn="auto" latinLnBrk="0" hangingPunct="1">
+              <a:lnSpc>
+                <a:spcPct val="100000"/>
+              </a:lnSpc>
+              <a:spcBef>
+                <a:spcPts val="0"/>
+              </a:spcBef>
+              <a:spcAft>
+                <a:spcPts val="0"/>
+              </a:spcAft>
+              <a:buClrTx/>
+              <a:buSzTx/>
+              <a:buFontTx/>
+              <a:buNone/>
+              <a:tabLst/>
+              <a:defRPr/>
+            </a:pPr>
+            <a:r>
+              <a:rPr lang="en-GB" sz="1200" b="1" i="0" u="none" strike="noStrike" kern="1200" dirty="0">
+                <a:solidFill>
+                  <a:schemeClr val="tx1"/>
+                </a:solidFill>
+                <a:effectLst/>
+                <a:latin typeface="+mn-lt"/>
+                <a:ea typeface="+mn-ea"/>
+                <a:cs typeface="+mn-cs"/>
+              </a:rPr>
+              <a:t>Achieving Data Sovereignty for EU Enterprises Through European Cloud Infrastructure: A Comparative Analysis of Technical Capabilities and Regulatory Compliance</a:t>
+            </a:r>
+            <a:endParaRPr lang="en-GB" b="1" dirty="0">
+              <a:effectLst/>
+            </a:endParaRPr>
+          </a:p>
+          <a:p>
+            <a:endParaRPr lang="en-GB" dirty="0"/>
+          </a:p>
+        </p:txBody>
+      </p:sp>
+      <p:sp>
+        <p:nvSpPr>
+          <p:cNvPr id="4" name="Slide Number Placeholder 3"/>
+          <p:cNvSpPr>
+            <a:spLocks noGrp="1"/>
+          </p:cNvSpPr>
+          <p:nvPr>
+            <p:ph type="sldNum" sz="quarter" idx="5"/>
+          </p:nvPr>
+        </p:nvSpPr>
+        <p:spPr/>
+        <p:txBody>
+          <a:bodyPr/>
+          <a:lstStyle/>
+          <a:p>
+            <a:fld id="{795672DF-11A1-4EBD-934B-12FD96B82173}" type="slidenum">
+              <a:rPr lang="en-GB" smtClean="0"/>
+              <a:t>2</a:t>
+            </a:fld>
+            <a:endParaRPr lang="en-GB"/>
+          </a:p>
+        </p:txBody>
+      </p:sp>
+    </p:spTree>
+    <p:extLst>
+      <p:ext uri="{BB962C8B-B14F-4D97-AF65-F5344CB8AC3E}">
+        <p14:creationId xmlns:p14="http://schemas.microsoft.com/office/powerpoint/2010/main" val="3578014512"/>
+      </p:ext>
+    </p:extLst>
+  </p:cSld>
+  <p:clrMapOvr>
+    <a:masterClrMapping/>
+  </p:clrMapOvr>
+</p:notes>
+</file>
+
+<file path=ppt/notesSlides/notesSlide3.xml><?xml version="1.0" encoding="utf-8"?>
+<p:notes xmlns:a="http://schemas.openxmlformats.org/drawingml/2006/main" xmlns:r="http://schemas.openxmlformats.org/officeDocument/2006/relationships" xmlns:p="http://schemas.openxmlformats.org/presentationml/2006/main">
+  <p:cSld>
+    <p:spTree>
+      <p:nvGrpSpPr>
+        <p:cNvPr id="1" name=""/>
+        <p:cNvGrpSpPr/>
+        <p:nvPr/>
+      </p:nvGrpSpPr>
+      <p:grpSpPr>
+        <a:xfrm>
+          <a:off x="0" y="0"/>
+          <a:ext cx="0" cy="0"/>
+          <a:chOff x="0" y="0"/>
+          <a:chExt cx="0" cy="0"/>
+        </a:xfrm>
+      </p:grpSpPr>
+      <p:sp>
+        <p:nvSpPr>
+          <p:cNvPr id="2" name="Slide Image Placeholder 1"/>
+          <p:cNvSpPr>
+            <a:spLocks noGrp="1" noRot="1" noChangeAspect="1"/>
+          </p:cNvSpPr>
+          <p:nvPr>
+            <p:ph type="sldImg"/>
+          </p:nvPr>
+        </p:nvSpPr>
+        <p:spPr/>
+      </p:sp>
+      <p:sp>
+        <p:nvSpPr>
+          <p:cNvPr id="3" name="Notes Placeholder 2"/>
+          <p:cNvSpPr>
+            <a:spLocks noGrp="1"/>
+          </p:cNvSpPr>
+          <p:nvPr>
+            <p:ph type="body" idx="1"/>
+          </p:nvPr>
+        </p:nvSpPr>
+        <p:spPr/>
+        <p:txBody>
+          <a:bodyPr/>
+          <a:lstStyle/>
+          <a:p>
+            <a:pPr marL="0" marR="0" lvl="0" indent="0" algn="l" defTabSz="914400" rtl="0" eaLnBrk="1" fontAlgn="auto" latinLnBrk="0" hangingPunct="1">
+              <a:lnSpc>
+                <a:spcPct val="100000"/>
+              </a:lnSpc>
+              <a:spcBef>
+                <a:spcPts val="0"/>
+              </a:spcBef>
+              <a:spcAft>
+                <a:spcPts val="0"/>
+              </a:spcAft>
+              <a:buClrTx/>
+              <a:buSzTx/>
+              <a:buFontTx/>
+              <a:buNone/>
+              <a:tabLst/>
+              <a:defRPr/>
+            </a:pPr>
+            <a:r>
+              <a:rPr lang="en-GB" sz="1200" b="1" i="0" u="none" strike="noStrike" kern="1200" dirty="0">
+                <a:solidFill>
+                  <a:schemeClr val="tx1"/>
+                </a:solidFill>
+                <a:effectLst/>
+                <a:latin typeface="+mn-lt"/>
+                <a:ea typeface="+mn-ea"/>
+                <a:cs typeface="+mn-cs"/>
+              </a:rPr>
+              <a:t>Achieving Data Sovereignty for EU Enterprises Through European Cloud Infrastructure: A Comparative Analysis of Technical Capabilities and Regulatory Compliance</a:t>
+            </a:r>
+            <a:endParaRPr lang="en-GB" b="1" dirty="0">
+              <a:effectLst/>
+            </a:endParaRPr>
+          </a:p>
+          <a:p>
+            <a:endParaRPr lang="en-GB" dirty="0"/>
+          </a:p>
+        </p:txBody>
+      </p:sp>
+      <p:sp>
+        <p:nvSpPr>
+          <p:cNvPr id="4" name="Slide Number Placeholder 3"/>
+          <p:cNvSpPr>
+            <a:spLocks noGrp="1"/>
+          </p:cNvSpPr>
+          <p:nvPr>
+            <p:ph type="sldNum" sz="quarter" idx="5"/>
+          </p:nvPr>
+        </p:nvSpPr>
+        <p:spPr/>
+        <p:txBody>
+          <a:bodyPr/>
+          <a:lstStyle/>
+          <a:p>
+            <a:fld id="{795672DF-11A1-4EBD-934B-12FD96B82173}" type="slidenum">
+              <a:rPr lang="en-GB" smtClean="0"/>
+              <a:t>3</a:t>
+            </a:fld>
+            <a:endParaRPr lang="en-GB"/>
+          </a:p>
+        </p:txBody>
+      </p:sp>
+    </p:spTree>
+    <p:extLst>
+      <p:ext uri="{BB962C8B-B14F-4D97-AF65-F5344CB8AC3E}">
+        <p14:creationId xmlns:p14="http://schemas.microsoft.com/office/powerpoint/2010/main" val="3609237244"/>
+      </p:ext>
+    </p:extLst>
+  </p:cSld>
+  <p:clrMapOvr>
+    <a:masterClrMapping/>
+  </p:clrMapOvr>
+</p:notes>
+</file>
+
+<file path=ppt/notesSlides/notesSlide4.xml><?xml version="1.0" encoding="utf-8"?>
+<p:notes xmlns:a="http://schemas.openxmlformats.org/drawingml/2006/main" xmlns:r="http://schemas.openxmlformats.org/officeDocument/2006/relationships" xmlns:p="http://schemas.openxmlformats.org/presentationml/2006/main">
+  <p:cSld>
+    <p:spTree>
+      <p:nvGrpSpPr>
+        <p:cNvPr id="1" name=""/>
+        <p:cNvGrpSpPr/>
+        <p:nvPr/>
+      </p:nvGrpSpPr>
+      <p:grpSpPr>
+        <a:xfrm>
+          <a:off x="0" y="0"/>
+          <a:ext cx="0" cy="0"/>
+          <a:chOff x="0" y="0"/>
+          <a:chExt cx="0" cy="0"/>
+        </a:xfrm>
+      </p:grpSpPr>
+      <p:sp>
+        <p:nvSpPr>
+          <p:cNvPr id="2" name="Slide Image Placeholder 1"/>
+          <p:cNvSpPr>
+            <a:spLocks noGrp="1" noRot="1" noChangeAspect="1"/>
+          </p:cNvSpPr>
+          <p:nvPr>
+            <p:ph type="sldImg"/>
+          </p:nvPr>
+        </p:nvSpPr>
+        <p:spPr/>
+      </p:sp>
+      <p:sp>
+        <p:nvSpPr>
+          <p:cNvPr id="3" name="Notes Placeholder 2"/>
+          <p:cNvSpPr>
+            <a:spLocks noGrp="1"/>
+          </p:cNvSpPr>
+          <p:nvPr>
+            <p:ph type="body" idx="1"/>
+          </p:nvPr>
+        </p:nvSpPr>
+        <p:spPr/>
+        <p:txBody>
+          <a:bodyPr/>
+          <a:lstStyle/>
+          <a:p>
+            <a:pPr marL="0" marR="0" lvl="0" indent="0" algn="l" defTabSz="914400" rtl="0" eaLnBrk="1" fontAlgn="auto" latinLnBrk="0" hangingPunct="1">
+              <a:lnSpc>
+                <a:spcPct val="100000"/>
+              </a:lnSpc>
+              <a:spcBef>
+                <a:spcPts val="0"/>
+              </a:spcBef>
+              <a:spcAft>
+                <a:spcPts val="0"/>
+              </a:spcAft>
+              <a:buClrTx/>
+              <a:buSzTx/>
+              <a:buFontTx/>
+              <a:buNone/>
+              <a:tabLst/>
+              <a:defRPr/>
+            </a:pPr>
+            <a:r>
+              <a:rPr lang="en-GB" sz="1200" b="1" i="0" u="none" strike="noStrike" kern="1200" dirty="0">
+                <a:solidFill>
+                  <a:schemeClr val="tx1"/>
+                </a:solidFill>
+                <a:effectLst/>
+                <a:latin typeface="+mn-lt"/>
+                <a:ea typeface="+mn-ea"/>
+                <a:cs typeface="+mn-cs"/>
+              </a:rPr>
+              <a:t>Achieving Data Sovereignty for EU Enterprises Through European Cloud Infrastructure: A Comparative Analysis of Technical Capabilities and Regulatory Compliance</a:t>
+            </a:r>
+            <a:endParaRPr lang="en-GB" b="1" dirty="0">
+              <a:effectLst/>
+            </a:endParaRPr>
+          </a:p>
+          <a:p>
+            <a:endParaRPr lang="en-GB" dirty="0"/>
+          </a:p>
+        </p:txBody>
+      </p:sp>
+      <p:sp>
+        <p:nvSpPr>
+          <p:cNvPr id="4" name="Slide Number Placeholder 3"/>
+          <p:cNvSpPr>
+            <a:spLocks noGrp="1"/>
+          </p:cNvSpPr>
+          <p:nvPr>
+            <p:ph type="sldNum" sz="quarter" idx="5"/>
+          </p:nvPr>
+        </p:nvSpPr>
+        <p:spPr/>
+        <p:txBody>
+          <a:bodyPr/>
+          <a:lstStyle/>
+          <a:p>
+            <a:fld id="{795672DF-11A1-4EBD-934B-12FD96B82173}" type="slidenum">
+              <a:rPr lang="en-GB" smtClean="0"/>
+              <a:t>4</a:t>
+            </a:fld>
+            <a:endParaRPr lang="en-GB"/>
+          </a:p>
+        </p:txBody>
+      </p:sp>
+    </p:spTree>
+    <p:extLst>
+      <p:ext uri="{BB962C8B-B14F-4D97-AF65-F5344CB8AC3E}">
+        <p14:creationId xmlns:p14="http://schemas.microsoft.com/office/powerpoint/2010/main" val="2677969402"/>
+      </p:ext>
+    </p:extLst>
+  </p:cSld>
+  <p:clrMapOvr>
+    <a:masterClrMapping/>
+  </p:clrMapOvr>
+</p:notes>
+</file>
+
+<file path=ppt/notesSlides/notesSlide5.xml><?xml version="1.0" encoding="utf-8"?>
+<p:notes xmlns:a="http://schemas.openxmlformats.org/drawingml/2006/main" xmlns:r="http://schemas.openxmlformats.org/officeDocument/2006/relationships" xmlns:p="http://schemas.openxmlformats.org/presentationml/2006/main">
+  <p:cSld>
+    <p:spTree>
+      <p:nvGrpSpPr>
+        <p:cNvPr id="1" name=""/>
+        <p:cNvGrpSpPr/>
+        <p:nvPr/>
+      </p:nvGrpSpPr>
+      <p:grpSpPr>
+        <a:xfrm>
+          <a:off x="0" y="0"/>
+          <a:ext cx="0" cy="0"/>
+          <a:chOff x="0" y="0"/>
+          <a:chExt cx="0" cy="0"/>
+        </a:xfrm>
+      </p:grpSpPr>
+      <p:sp>
+        <p:nvSpPr>
+          <p:cNvPr id="2" name="Slide Image Placeholder 1"/>
+          <p:cNvSpPr>
+            <a:spLocks noGrp="1" noRot="1" noChangeAspect="1"/>
+          </p:cNvSpPr>
+          <p:nvPr>
+            <p:ph type="sldImg"/>
+          </p:nvPr>
+        </p:nvSpPr>
+        <p:spPr/>
+      </p:sp>
+      <p:sp>
+        <p:nvSpPr>
+          <p:cNvPr id="3" name="Notes Placeholder 2"/>
+          <p:cNvSpPr>
+            <a:spLocks noGrp="1"/>
+          </p:cNvSpPr>
+          <p:nvPr>
+            <p:ph type="body" idx="1"/>
+          </p:nvPr>
+        </p:nvSpPr>
+        <p:spPr/>
+        <p:txBody>
+          <a:bodyPr/>
+          <a:lstStyle/>
+          <a:p>
+            <a:pPr marL="0" marR="0" lvl="0" indent="0" algn="l" defTabSz="914400" rtl="0" eaLnBrk="1" fontAlgn="auto" latinLnBrk="0" hangingPunct="1">
+              <a:lnSpc>
+                <a:spcPct val="100000"/>
+              </a:lnSpc>
+              <a:spcBef>
+                <a:spcPts val="0"/>
+              </a:spcBef>
+              <a:spcAft>
+                <a:spcPts val="0"/>
+              </a:spcAft>
+              <a:buClrTx/>
+              <a:buSzTx/>
+              <a:buFontTx/>
+              <a:buNone/>
+              <a:tabLst/>
+              <a:defRPr/>
+            </a:pPr>
+            <a:r>
+              <a:rPr lang="en-GB" sz="1200" b="1" i="0" u="none" strike="noStrike" kern="1200" dirty="0">
+                <a:solidFill>
+                  <a:schemeClr val="tx1"/>
+                </a:solidFill>
+                <a:effectLst/>
+                <a:latin typeface="+mn-lt"/>
+                <a:ea typeface="+mn-ea"/>
+                <a:cs typeface="+mn-cs"/>
+              </a:rPr>
+              <a:t>Achieving Data Sovereignty for EU Enterprises Through European Cloud Infrastructure: A Comparative Analysis of Technical Capabilities and Regulatory Compliance</a:t>
+            </a:r>
+            <a:endParaRPr lang="en-GB" b="1" dirty="0">
+              <a:effectLst/>
+            </a:endParaRPr>
+          </a:p>
+          <a:p>
+            <a:endParaRPr lang="en-GB" dirty="0"/>
+          </a:p>
+        </p:txBody>
+      </p:sp>
+      <p:sp>
+        <p:nvSpPr>
+          <p:cNvPr id="4" name="Slide Number Placeholder 3"/>
+          <p:cNvSpPr>
+            <a:spLocks noGrp="1"/>
+          </p:cNvSpPr>
+          <p:nvPr>
+            <p:ph type="sldNum" sz="quarter" idx="5"/>
+          </p:nvPr>
+        </p:nvSpPr>
+        <p:spPr/>
+        <p:txBody>
+          <a:bodyPr/>
+          <a:lstStyle/>
+          <a:p>
+            <a:fld id="{795672DF-11A1-4EBD-934B-12FD96B82173}" type="slidenum">
+              <a:rPr lang="en-GB" smtClean="0"/>
+              <a:t>5</a:t>
+            </a:fld>
+            <a:endParaRPr lang="en-GB"/>
+          </a:p>
+        </p:txBody>
+      </p:sp>
+    </p:spTree>
+    <p:extLst>
+      <p:ext uri="{BB962C8B-B14F-4D97-AF65-F5344CB8AC3E}">
+        <p14:creationId xmlns:p14="http://schemas.microsoft.com/office/powerpoint/2010/main" val="4135888507"/>
+      </p:ext>
+    </p:extLst>
+  </p:cSld>
+  <p:clrMapOvr>
+    <a:masterClrMapping/>
+  </p:clrMapOvr>
+</p:notes>
+</file>
+
+<file path=ppt/notesSlides/notesSlide6.xml><?xml version="1.0" encoding="utf-8"?>
+<p:notes xmlns:a="http://schemas.openxmlformats.org/drawingml/2006/main" xmlns:r="http://schemas.openxmlformats.org/officeDocument/2006/relationships" xmlns:p="http://schemas.openxmlformats.org/presentationml/2006/main">
+  <p:cSld>
+    <p:spTree>
+      <p:nvGrpSpPr>
+        <p:cNvPr id="1" name=""/>
+        <p:cNvGrpSpPr/>
+        <p:nvPr/>
+      </p:nvGrpSpPr>
+      <p:grpSpPr>
+        <a:xfrm>
+          <a:off x="0" y="0"/>
+          <a:ext cx="0" cy="0"/>
+          <a:chOff x="0" y="0"/>
+          <a:chExt cx="0" cy="0"/>
+        </a:xfrm>
+      </p:grpSpPr>
+      <p:sp>
+        <p:nvSpPr>
+          <p:cNvPr id="2" name="Slide Image Placeholder 1"/>
+          <p:cNvSpPr>
+            <a:spLocks noGrp="1" noRot="1" noChangeAspect="1"/>
+          </p:cNvSpPr>
+          <p:nvPr>
+            <p:ph type="sldImg"/>
+          </p:nvPr>
+        </p:nvSpPr>
+        <p:spPr/>
+      </p:sp>
+      <p:sp>
+        <p:nvSpPr>
+          <p:cNvPr id="3" name="Notes Placeholder 2"/>
+          <p:cNvSpPr>
+            <a:spLocks noGrp="1"/>
+          </p:cNvSpPr>
+          <p:nvPr>
+            <p:ph type="body" idx="1"/>
+          </p:nvPr>
+        </p:nvSpPr>
+        <p:spPr/>
+        <p:txBody>
+          <a:bodyPr/>
+          <a:lstStyle/>
+          <a:p>
+            <a:pPr marL="0" marR="0" lvl="0" indent="0" algn="l" defTabSz="914400" rtl="0" eaLnBrk="1" fontAlgn="auto" latinLnBrk="0" hangingPunct="1">
+              <a:lnSpc>
+                <a:spcPct val="100000"/>
+              </a:lnSpc>
+              <a:spcBef>
+                <a:spcPts val="0"/>
+              </a:spcBef>
+              <a:spcAft>
+                <a:spcPts val="0"/>
+              </a:spcAft>
+              <a:buClrTx/>
+              <a:buSzTx/>
+              <a:buFontTx/>
+              <a:buNone/>
+              <a:tabLst/>
+              <a:defRPr/>
+            </a:pPr>
+            <a:r>
+              <a:rPr lang="en-GB" sz="1200" b="1" i="0" u="none" strike="noStrike" kern="1200" dirty="0">
+                <a:solidFill>
+                  <a:schemeClr val="tx1"/>
+                </a:solidFill>
+                <a:effectLst/>
+                <a:latin typeface="+mn-lt"/>
+                <a:ea typeface="+mn-ea"/>
+                <a:cs typeface="+mn-cs"/>
+              </a:rPr>
+              <a:t>Achieving Data Sovereignty for EU Enterprises Through European Cloud Infrastructure: A Comparative Analysis of Technical Capabilities and Regulatory Compliance</a:t>
+            </a:r>
+            <a:endParaRPr lang="en-GB" b="1" dirty="0">
+              <a:effectLst/>
+            </a:endParaRPr>
+          </a:p>
+          <a:p>
+            <a:endParaRPr lang="en-GB" dirty="0"/>
+          </a:p>
+        </p:txBody>
+      </p:sp>
+      <p:sp>
+        <p:nvSpPr>
+          <p:cNvPr id="4" name="Slide Number Placeholder 3"/>
+          <p:cNvSpPr>
+            <a:spLocks noGrp="1"/>
+          </p:cNvSpPr>
+          <p:nvPr>
+            <p:ph type="sldNum" sz="quarter" idx="5"/>
+          </p:nvPr>
+        </p:nvSpPr>
+        <p:spPr/>
+        <p:txBody>
+          <a:bodyPr/>
+          <a:lstStyle/>
+          <a:p>
+            <a:fld id="{795672DF-11A1-4EBD-934B-12FD96B82173}" type="slidenum">
+              <a:rPr lang="en-GB" smtClean="0"/>
+              <a:t>6</a:t>
+            </a:fld>
+            <a:endParaRPr lang="en-GB"/>
+          </a:p>
+        </p:txBody>
+      </p:sp>
+    </p:spTree>
+    <p:extLst>
+      <p:ext uri="{BB962C8B-B14F-4D97-AF65-F5344CB8AC3E}">
+        <p14:creationId xmlns:p14="http://schemas.microsoft.com/office/powerpoint/2010/main" val="1179793202"/>
+      </p:ext>
+    </p:extLst>
+  </p:cSld>
+  <p:clrMapOvr>
+    <a:masterClrMapping/>
+  </p:clrMapOvr>
+</p:notes>
+</file>
+
+<file path=ppt/notesSlides/notesSlide7.xml><?xml version="1.0" encoding="utf-8"?>
+<p:notes xmlns:a="http://schemas.openxmlformats.org/drawingml/2006/main" xmlns:r="http://schemas.openxmlformats.org/officeDocument/2006/relationships" xmlns:p="http://schemas.openxmlformats.org/presentationml/2006/main">
+  <p:cSld>
+    <p:spTree>
+      <p:nvGrpSpPr>
+        <p:cNvPr id="1" name=""/>
+        <p:cNvGrpSpPr/>
+        <p:nvPr/>
+      </p:nvGrpSpPr>
+      <p:grpSpPr>
+        <a:xfrm>
+          <a:off x="0" y="0"/>
+          <a:ext cx="0" cy="0"/>
+          <a:chOff x="0" y="0"/>
+          <a:chExt cx="0" cy="0"/>
+        </a:xfrm>
+      </p:grpSpPr>
+      <p:sp>
+        <p:nvSpPr>
+          <p:cNvPr id="2" name="Slide Image Placeholder 1"/>
+          <p:cNvSpPr>
+            <a:spLocks noGrp="1" noRot="1" noChangeAspect="1"/>
+          </p:cNvSpPr>
+          <p:nvPr>
+            <p:ph type="sldImg"/>
+          </p:nvPr>
+        </p:nvSpPr>
+        <p:spPr/>
+      </p:sp>
+      <p:sp>
+        <p:nvSpPr>
+          <p:cNvPr id="3" name="Notes Placeholder 2"/>
+          <p:cNvSpPr>
+            <a:spLocks noGrp="1"/>
+          </p:cNvSpPr>
+          <p:nvPr>
+            <p:ph type="body" idx="1"/>
+          </p:nvPr>
+        </p:nvSpPr>
+        <p:spPr/>
+        <p:txBody>
+          <a:bodyPr/>
+          <a:lstStyle/>
+          <a:p>
+            <a:pPr marL="0" marR="0" lvl="0" indent="0" algn="l" defTabSz="914400" rtl="0" eaLnBrk="1" fontAlgn="auto" latinLnBrk="0" hangingPunct="1">
+              <a:lnSpc>
+                <a:spcPct val="100000"/>
+              </a:lnSpc>
+              <a:spcBef>
+                <a:spcPts val="0"/>
+              </a:spcBef>
+              <a:spcAft>
+                <a:spcPts val="0"/>
+              </a:spcAft>
+              <a:buClrTx/>
+              <a:buSzTx/>
+              <a:buFontTx/>
+              <a:buNone/>
+              <a:tabLst/>
+              <a:defRPr/>
+            </a:pPr>
+            <a:r>
+              <a:rPr lang="en-GB" sz="1200" b="1" i="0" u="none" strike="noStrike" kern="1200" dirty="0">
+                <a:solidFill>
+                  <a:schemeClr val="tx1"/>
+                </a:solidFill>
+                <a:effectLst/>
+                <a:latin typeface="+mn-lt"/>
+                <a:ea typeface="+mn-ea"/>
+                <a:cs typeface="+mn-cs"/>
+              </a:rPr>
+              <a:t>Achieving Data Sovereignty for EU Enterprises Through European Cloud Infrastructure: A Comparative Analysis of Technical Capabilities and Regulatory Compliance</a:t>
+            </a:r>
+            <a:endParaRPr lang="en-GB" b="1" dirty="0">
+              <a:effectLst/>
+            </a:endParaRPr>
+          </a:p>
+          <a:p>
+            <a:endParaRPr lang="en-GB" dirty="0"/>
+          </a:p>
+        </p:txBody>
+      </p:sp>
+      <p:sp>
+        <p:nvSpPr>
+          <p:cNvPr id="4" name="Slide Number Placeholder 3"/>
+          <p:cNvSpPr>
+            <a:spLocks noGrp="1"/>
+          </p:cNvSpPr>
+          <p:nvPr>
+            <p:ph type="sldNum" sz="quarter" idx="5"/>
+          </p:nvPr>
+        </p:nvSpPr>
+        <p:spPr/>
+        <p:txBody>
+          <a:bodyPr/>
+          <a:lstStyle/>
+          <a:p>
+            <a:fld id="{795672DF-11A1-4EBD-934B-12FD96B82173}" type="slidenum">
+              <a:rPr lang="en-GB" smtClean="0"/>
+              <a:t>7</a:t>
+            </a:fld>
+            <a:endParaRPr lang="en-GB"/>
+          </a:p>
+        </p:txBody>
+      </p:sp>
+    </p:spTree>
+    <p:extLst>
+      <p:ext uri="{BB962C8B-B14F-4D97-AF65-F5344CB8AC3E}">
+        <p14:creationId xmlns:p14="http://schemas.microsoft.com/office/powerpoint/2010/main" val="2055292364"/>
+      </p:ext>
+    </p:extLst>
+  </p:cSld>
+  <p:clrMapOvr>
+    <a:masterClrMapping/>
+  </p:clrMapOvr>
+</p:notes>
+</file>
+
+<file path=ppt/notesSlides/notesSlide8.xml><?xml version="1.0" encoding="utf-8"?>
+<p:notes xmlns:a="http://schemas.openxmlformats.org/drawingml/2006/main" xmlns:r="http://schemas.openxmlformats.org/officeDocument/2006/relationships" xmlns:p="http://schemas.openxmlformats.org/presentationml/2006/main">
+  <p:cSld>
+    <p:spTree>
+      <p:nvGrpSpPr>
+        <p:cNvPr id="1" name=""/>
+        <p:cNvGrpSpPr/>
+        <p:nvPr/>
+      </p:nvGrpSpPr>
+      <p:grpSpPr>
+        <a:xfrm>
+          <a:off x="0" y="0"/>
+          <a:ext cx="0" cy="0"/>
+          <a:chOff x="0" y="0"/>
+          <a:chExt cx="0" cy="0"/>
+        </a:xfrm>
+      </p:grpSpPr>
+      <p:sp>
+        <p:nvSpPr>
+          <p:cNvPr id="2" name="Slide Image Placeholder 1"/>
+          <p:cNvSpPr>
+            <a:spLocks noGrp="1" noRot="1" noChangeAspect="1"/>
+          </p:cNvSpPr>
+          <p:nvPr>
+            <p:ph type="sldImg"/>
+          </p:nvPr>
+        </p:nvSpPr>
+        <p:spPr/>
+      </p:sp>
+      <p:sp>
+        <p:nvSpPr>
+          <p:cNvPr id="3" name="Notes Placeholder 2"/>
+          <p:cNvSpPr>
+            <a:spLocks noGrp="1"/>
+          </p:cNvSpPr>
+          <p:nvPr>
+            <p:ph type="body" idx="1"/>
+          </p:nvPr>
+        </p:nvSpPr>
+        <p:spPr/>
+        <p:txBody>
+          <a:bodyPr/>
+          <a:lstStyle/>
+          <a:p>
+            <a:pPr marL="0" marR="0" lvl="0" indent="0" algn="l" defTabSz="914400" rtl="0" eaLnBrk="1" fontAlgn="auto" latinLnBrk="0" hangingPunct="1">
+              <a:lnSpc>
+                <a:spcPct val="100000"/>
+              </a:lnSpc>
+              <a:spcBef>
+                <a:spcPts val="0"/>
+              </a:spcBef>
+              <a:spcAft>
+                <a:spcPts val="0"/>
+              </a:spcAft>
+              <a:buClrTx/>
+              <a:buSzTx/>
+              <a:buFontTx/>
+              <a:buNone/>
+              <a:tabLst/>
+              <a:defRPr/>
+            </a:pPr>
+            <a:r>
+              <a:rPr lang="en-GB" sz="1200" b="1" i="0" u="none" strike="noStrike" kern="1200" dirty="0">
+                <a:solidFill>
+                  <a:schemeClr val="tx1"/>
+                </a:solidFill>
+                <a:effectLst/>
+                <a:latin typeface="+mn-lt"/>
+                <a:ea typeface="+mn-ea"/>
+                <a:cs typeface="+mn-cs"/>
+              </a:rPr>
+              <a:t>Achieving Data Sovereignty for EU Enterprises Through European Cloud Infrastructure: A Comparative Analysis of Technical Capabilities and Regulatory Compliance</a:t>
+            </a:r>
+            <a:endParaRPr lang="en-GB" b="1" dirty="0">
+              <a:effectLst/>
+            </a:endParaRPr>
+          </a:p>
+          <a:p>
+            <a:endParaRPr lang="en-GB" dirty="0"/>
+          </a:p>
+        </p:txBody>
+      </p:sp>
+      <p:sp>
+        <p:nvSpPr>
+          <p:cNvPr id="4" name="Slide Number Placeholder 3"/>
+          <p:cNvSpPr>
+            <a:spLocks noGrp="1"/>
+          </p:cNvSpPr>
+          <p:nvPr>
+            <p:ph type="sldNum" sz="quarter" idx="5"/>
+          </p:nvPr>
+        </p:nvSpPr>
+        <p:spPr/>
+        <p:txBody>
+          <a:bodyPr/>
+          <a:lstStyle/>
+          <a:p>
+            <a:fld id="{795672DF-11A1-4EBD-934B-12FD96B82173}" type="slidenum">
+              <a:rPr lang="en-GB" smtClean="0"/>
+              <a:t>8</a:t>
+            </a:fld>
+            <a:endParaRPr lang="en-GB"/>
+          </a:p>
+        </p:txBody>
+      </p:sp>
+    </p:spTree>
+    <p:extLst>
+      <p:ext uri="{BB962C8B-B14F-4D97-AF65-F5344CB8AC3E}">
+        <p14:creationId xmlns:p14="http://schemas.microsoft.com/office/powerpoint/2010/main" val="4214855566"/>
+      </p:ext>
+    </p:extLst>
+  </p:cSld>
+  <p:clrMapOvr>
+    <a:masterClrMapping/>
+  </p:clrMapOvr>
+</p:notes>
+</file>
+
+<file path=ppt/notesSlides/notesSlide9.xml><?xml version="1.0" encoding="utf-8"?>
+<p:notes xmlns:a="http://schemas.openxmlformats.org/drawingml/2006/main" xmlns:r="http://schemas.openxmlformats.org/officeDocument/2006/relationships" xmlns:p="http://schemas.openxmlformats.org/presentationml/2006/main">
+  <p:cSld>
+    <p:spTree>
+      <p:nvGrpSpPr>
+        <p:cNvPr id="1" name=""/>
+        <p:cNvGrpSpPr/>
+        <p:nvPr/>
+      </p:nvGrpSpPr>
+      <p:grpSpPr>
+        <a:xfrm>
+          <a:off x="0" y="0"/>
+          <a:ext cx="0" cy="0"/>
+          <a:chOff x="0" y="0"/>
+          <a:chExt cx="0" cy="0"/>
+        </a:xfrm>
+      </p:grpSpPr>
+      <p:sp>
+        <p:nvSpPr>
+          <p:cNvPr id="2" name="Slide Image Placeholder 1"/>
+          <p:cNvSpPr>
+            <a:spLocks noGrp="1" noRot="1" noChangeAspect="1"/>
+          </p:cNvSpPr>
+          <p:nvPr>
+            <p:ph type="sldImg"/>
+          </p:nvPr>
+        </p:nvSpPr>
+        <p:spPr/>
+      </p:sp>
+      <p:sp>
+        <p:nvSpPr>
+          <p:cNvPr id="3" name="Notes Placeholder 2"/>
+          <p:cNvSpPr>
+            <a:spLocks noGrp="1"/>
+          </p:cNvSpPr>
+          <p:nvPr>
+            <p:ph type="body" idx="1"/>
+          </p:nvPr>
+        </p:nvSpPr>
+        <p:spPr/>
+        <p:txBody>
+          <a:bodyPr/>
+          <a:lstStyle/>
+          <a:p>
+            <a:pPr marL="0" marR="0" lvl="0" indent="0" algn="l" defTabSz="914400" rtl="0" eaLnBrk="1" fontAlgn="auto" latinLnBrk="0" hangingPunct="1">
+              <a:lnSpc>
+                <a:spcPct val="100000"/>
+              </a:lnSpc>
+              <a:spcBef>
+                <a:spcPts val="0"/>
+              </a:spcBef>
+              <a:spcAft>
+                <a:spcPts val="0"/>
+              </a:spcAft>
+              <a:buClrTx/>
+              <a:buSzTx/>
+              <a:buFontTx/>
+              <a:buNone/>
+              <a:tabLst/>
+              <a:defRPr/>
+            </a:pPr>
+            <a:r>
+              <a:rPr lang="en-GB" sz="1200" b="1" i="0" u="none" strike="noStrike" kern="1200" dirty="0">
+                <a:solidFill>
+                  <a:schemeClr val="tx1"/>
+                </a:solidFill>
+                <a:effectLst/>
+                <a:latin typeface="+mn-lt"/>
+                <a:ea typeface="+mn-ea"/>
+                <a:cs typeface="+mn-cs"/>
+              </a:rPr>
+              <a:t>Achieving Data Sovereignty for EU Enterprises Through European Cloud Infrastructure: A Comparative Analysis of Technical Capabilities and Regulatory Compliance</a:t>
+            </a:r>
+            <a:endParaRPr lang="en-GB" b="1" dirty="0">
+              <a:effectLst/>
+            </a:endParaRPr>
+          </a:p>
+          <a:p>
+            <a:endParaRPr lang="en-GB" dirty="0"/>
+          </a:p>
+        </p:txBody>
+      </p:sp>
+      <p:sp>
+        <p:nvSpPr>
+          <p:cNvPr id="4" name="Slide Number Placeholder 3"/>
+          <p:cNvSpPr>
+            <a:spLocks noGrp="1"/>
+          </p:cNvSpPr>
+          <p:nvPr>
+            <p:ph type="sldNum" sz="quarter" idx="5"/>
+          </p:nvPr>
+        </p:nvSpPr>
+        <p:spPr/>
+        <p:txBody>
+          <a:bodyPr/>
+          <a:lstStyle/>
+          <a:p>
+            <a:fld id="{795672DF-11A1-4EBD-934B-12FD96B82173}" type="slidenum">
+              <a:rPr lang="en-GB" smtClean="0"/>
+              <a:t>9</a:t>
+            </a:fld>
+            <a:endParaRPr lang="en-GB"/>
+          </a:p>
+        </p:txBody>
+      </p:sp>
+    </p:spTree>
+    <p:extLst>
+      <p:ext uri="{BB962C8B-B14F-4D97-AF65-F5344CB8AC3E}">
+        <p14:creationId xmlns:p14="http://schemas.microsoft.com/office/powerpoint/2010/main" val="2249928874"/>
+      </p:ext>
+    </p:extLst>
+  </p:cSld>
+  <p:clrMapOvr>
+    <a:masterClrMapping/>
+  </p:clrMapOvr>
+</p:notes>
+</file>
+
 <file path=ppt/slideLayouts/slideLayout1.xml><?xml version="1.0" encoding="utf-8"?>
 <p:sldLayout xmlns:a="http://schemas.openxmlformats.org/drawingml/2006/main" xmlns:r="http://schemas.openxmlformats.org/officeDocument/2006/relationships" xmlns:p="http://schemas.openxmlformats.org/presentationml/2006/main" type="title" preserve="1">
   <p:cSld name="Title Slide">
@@ -319,7 +2837,7 @@
           <a:p>
             <a:fld id="{5BCAD085-E8A6-8845-BD4E-CB4CCA059FC4}" type="datetimeFigureOut">
               <a:rPr lang="en-US" smtClean="0"/>
-              <a:t>7/17/2026</a:t>
+              <a:t>8/17/2026</a:t>
             </a:fld>
             <a:endParaRPr lang="en-US"/>
           </a:p>
@@ -487,7 +3005,7 @@
           <a:p>
             <a:fld id="{5BCAD085-E8A6-8845-BD4E-CB4CCA059FC4}" type="datetimeFigureOut">
               <a:rPr lang="en-US" smtClean="0"/>
-              <a:t>7/17/2026</a:t>
+              <a:t>8/17/2026</a:t>
             </a:fld>
             <a:endParaRPr lang="en-US"/>
           </a:p>
@@ -665,7 +3183,7 @@
           <a:p>
             <a:fld id="{5BCAD085-E8A6-8845-BD4E-CB4CCA059FC4}" type="datetimeFigureOut">
               <a:rPr lang="en-US" smtClean="0"/>
-              <a:t>7/17/2026</a:t>
+              <a:t>8/17/2026</a:t>
             </a:fld>
             <a:endParaRPr lang="en-US"/>
           </a:p>
@@ -833,7 +3351,7 @@
           <a:p>
             <a:fld id="{5BCAD085-E8A6-8845-BD4E-CB4CCA059FC4}" type="datetimeFigureOut">
               <a:rPr lang="en-US" smtClean="0"/>
-              <a:t>7/17/2026</a:t>
+              <a:t>8/17/2026</a:t>
             </a:fld>
             <a:endParaRPr lang="en-US"/>
           </a:p>
@@ -1078,7 +3596,7 @@
           <a:p>
             <a:fld id="{5BCAD085-E8A6-8845-BD4E-CB4CCA059FC4}" type="datetimeFigureOut">
               <a:rPr lang="en-US" smtClean="0"/>
-              <a:t>7/17/2026</a:t>
+              <a:t>8/17/2026</a:t>
             </a:fld>
             <a:endParaRPr lang="en-US"/>
           </a:p>
@@ -1363,7 +3881,7 @@
           <a:p>
             <a:fld id="{5BCAD085-E8A6-8845-BD4E-CB4CCA059FC4}" type="datetimeFigureOut">
               <a:rPr lang="en-US" smtClean="0"/>
-              <a:t>7/17/2026</a:t>
+              <a:t>8/17/2026</a:t>
             </a:fld>
             <a:endParaRPr lang="en-US"/>
           </a:p>
@@ -1782,7 +4300,7 @@
           <a:p>
             <a:fld id="{5BCAD085-E8A6-8845-BD4E-CB4CCA059FC4}" type="datetimeFigureOut">
               <a:rPr lang="en-US" smtClean="0"/>
-              <a:t>7/17/2026</a:t>
+              <a:t>8/17/2026</a:t>
             </a:fld>
             <a:endParaRPr lang="en-US"/>
           </a:p>
@@ -1899,7 +4417,7 @@
           <a:p>
             <a:fld id="{5BCAD085-E8A6-8845-BD4E-CB4CCA059FC4}" type="datetimeFigureOut">
               <a:rPr lang="en-US" smtClean="0"/>
-              <a:t>7/17/2026</a:t>
+              <a:t>8/17/2026</a:t>
             </a:fld>
             <a:endParaRPr lang="en-US"/>
           </a:p>
@@ -1994,7 +4512,7 @@
           <a:p>
             <a:fld id="{5BCAD085-E8A6-8845-BD4E-CB4CCA059FC4}" type="datetimeFigureOut">
               <a:rPr lang="en-US" smtClean="0"/>
-              <a:t>7/17/2026</a:t>
+              <a:t>8/17/2026</a:t>
             </a:fld>
             <a:endParaRPr lang="en-US"/>
           </a:p>
@@ -2269,7 +4787,7 @@
           <a:p>
             <a:fld id="{5BCAD085-E8A6-8845-BD4E-CB4CCA059FC4}" type="datetimeFigureOut">
               <a:rPr lang="en-US" smtClean="0"/>
-              <a:t>7/17/2026</a:t>
+              <a:t>8/17/2026</a:t>
             </a:fld>
             <a:endParaRPr lang="en-US"/>
           </a:p>
@@ -2521,7 +5039,7 @@
           <a:p>
             <a:fld id="{5BCAD085-E8A6-8845-BD4E-CB4CCA059FC4}" type="datetimeFigureOut">
               <a:rPr lang="en-US" smtClean="0"/>
-              <a:t>7/17/2026</a:t>
+              <a:t>8/17/2026</a:t>
             </a:fld>
             <a:endParaRPr lang="en-US"/>
           </a:p>
@@ -2732,7 +5250,7 @@
           <a:p>
             <a:fld id="{5BCAD085-E8A6-8845-BD4E-CB4CCA059FC4}" type="datetimeFigureOut">
               <a:rPr lang="en-US" smtClean="0"/>
-              <a:t>7/17/2026</a:t>
+              <a:t>8/17/2026</a:t>
             </a:fld>
             <a:endParaRPr lang="en-US"/>
           </a:p>
@@ -4923,7 +7441,7 @@
           <p:nvPr/>
         </p:nvPicPr>
         <p:blipFill>
-          <a:blip r:embed="rId2">
+          <a:blip r:embed="rId3">
             <a:extLst>
               <a:ext uri="{28A0092B-C50C-407E-A947-70E740481C1C}">
                 <a14:useLocalDpi xmlns:a14="http://schemas.microsoft.com/office/drawing/2010/main" val="0"/>
@@ -4970,7 +7488,7 @@
           <p:nvPr/>
         </p:nvPicPr>
         <p:blipFill>
-          <a:blip r:embed="rId3">
+          <a:blip r:embed="rId4">
             <a:extLst>
               <a:ext uri="{28A0092B-C50C-407E-A947-70E740481C1C}">
                 <a14:useLocalDpi xmlns:a14="http://schemas.microsoft.com/office/drawing/2010/main" val="0"/>
@@ -6852,7 +9370,7 @@
           <p:nvPr/>
         </p:nvPicPr>
         <p:blipFill>
-          <a:blip r:embed="rId2">
+          <a:blip r:embed="rId3">
             <a:extLst>
               <a:ext uri="{28A0092B-C50C-407E-A947-70E740481C1C}">
                 <a14:useLocalDpi xmlns:a14="http://schemas.microsoft.com/office/drawing/2010/main" val="0"/>
@@ -6899,7 +9417,7 @@
           <p:nvPr/>
         </p:nvPicPr>
         <p:blipFill>
-          <a:blip r:embed="rId3">
+          <a:blip r:embed="rId4">
             <a:extLst>
               <a:ext uri="{28A0092B-C50C-407E-A947-70E740481C1C}">
                 <a14:useLocalDpi xmlns:a14="http://schemas.microsoft.com/office/drawing/2010/main" val="0"/>
@@ -7162,7 +9680,7 @@
           <p:nvPr/>
         </p:nvPicPr>
         <p:blipFill>
-          <a:blip r:embed="rId2">
+          <a:blip r:embed="rId3">
             <a:extLst>
               <a:ext uri="{28A0092B-C50C-407E-A947-70E740481C1C}">
                 <a14:useLocalDpi xmlns:a14="http://schemas.microsoft.com/office/drawing/2010/main" val="0"/>
@@ -7209,7 +9727,7 @@
           <p:nvPr/>
         </p:nvPicPr>
         <p:blipFill>
-          <a:blip r:embed="rId3">
+          <a:blip r:embed="rId4">
             <a:extLst>
               <a:ext uri="{28A0092B-C50C-407E-A947-70E740481C1C}">
                 <a14:useLocalDpi xmlns:a14="http://schemas.microsoft.com/office/drawing/2010/main" val="0"/>
@@ -7525,7 +10043,7 @@
           <p:nvPr/>
         </p:nvPicPr>
         <p:blipFill>
-          <a:blip r:embed="rId2">
+          <a:blip r:embed="rId3">
             <a:extLst>
               <a:ext uri="{28A0092B-C50C-407E-A947-70E740481C1C}">
                 <a14:useLocalDpi xmlns:a14="http://schemas.microsoft.com/office/drawing/2010/main" val="0"/>
@@ -8616,7 +11134,7 @@
           <p:nvPr/>
         </p:nvPicPr>
         <p:blipFill>
-          <a:blip r:embed="rId2">
+          <a:blip r:embed="rId3">
             <a:extLst>
               <a:ext uri="{28A0092B-C50C-407E-A947-70E740481C1C}">
                 <a14:useLocalDpi xmlns:a14="http://schemas.microsoft.com/office/drawing/2010/main" val="0"/>
@@ -16310,14 +18828,30 @@
           <a:p>
             <a:pPr algn="l"/>
             <a:r>
-              <a:rPr sz="1350" b="0" i="0">
+              <a:rPr sz="1350" b="0" i="0" dirty="0">
                 <a:solidFill>
                   <a:srgbClr val="1A1A1A"/>
                 </a:solidFill>
               </a:rPr>
               <a:t>Cost control and avoiding the lock-in pricing power of proprietary
 vendors. Open-source stacks give you price transparency,
-negotiating power, and exit options that hyperscalers don't.</a:t>
+negotiating power, and exit options that </a:t>
+            </a:r>
+            <a:r>
+              <a:rPr sz="1350" b="0" i="0" dirty="0" err="1">
+                <a:solidFill>
+                  <a:srgbClr val="1A1A1A"/>
+                </a:solidFill>
+              </a:rPr>
+              <a:t>hyperscalers</a:t>
+            </a:r>
+            <a:r>
+              <a:rPr sz="1350" b="0" i="0" dirty="0">
+                <a:solidFill>
+                  <a:srgbClr val="1A1A1A"/>
+                </a:solidFill>
+              </a:rPr>
+              <a:t> don't.</a:t>
             </a:r>
           </a:p>
         </p:txBody>
@@ -16330,7 +18864,7 @@
         </p:nvSpPr>
         <p:spPr>
           <a:xfrm>
-            <a:off x="457200" y="5760720"/>
+            <a:off x="365760" y="5998464"/>
             <a:ext cx="11247120" cy="640080"/>
           </a:xfrm>
           <a:prstGeom prst="rect">
@@ -16346,7 +18880,7 @@
           <a:p>
             <a:pPr algn="l"/>
             <a:r>
-              <a:rPr sz="1150" b="0" i="1">
+              <a:rPr sz="1150" b="0" i="1" dirty="0">
                 <a:solidFill>
                   <a:srgbClr val="575757"/>
                 </a:solidFill>
@@ -22447,7 +24981,7 @@
           <p:nvPr/>
         </p:nvPicPr>
         <p:blipFill>
-          <a:blip r:embed="rId2"/>
+          <a:blip r:embed="rId3"/>
           <a:stretch>
             <a:fillRect/>
           </a:stretch>
@@ -22477,7 +25011,7 @@
           <p:nvPr/>
         </p:nvPicPr>
         <p:blipFill>
-          <a:blip r:embed="rId3"/>
+          <a:blip r:embed="rId4"/>
           <a:stretch>
             <a:fillRect/>
           </a:stretch>
@@ -22507,7 +25041,7 @@
           <p:nvPr/>
         </p:nvPicPr>
         <p:blipFill>
-          <a:blip r:embed="rId4"/>
+          <a:blip r:embed="rId5"/>
           <a:stretch>
             <a:fillRect/>
           </a:stretch>
@@ -22822,7 +25356,7 @@
           <p:nvPr/>
         </p:nvPicPr>
         <p:blipFill>
-          <a:blip r:embed="rId5">
+          <a:blip r:embed="rId6">
             <a:extLst>
               <a:ext uri="{28A0092B-C50C-407E-A947-70E740481C1C}">
                 <a14:useLocalDpi xmlns:a14="http://schemas.microsoft.com/office/drawing/2010/main" val="0"/>
@@ -22869,7 +25403,7 @@
           <p:nvPr/>
         </p:nvPicPr>
         <p:blipFill>
-          <a:blip r:embed="rId6"/>
+          <a:blip r:embed="rId7"/>
           <a:stretch>
             <a:fillRect/>
           </a:stretch>
@@ -24351,4 +26885,319 @@
   </a:objectDefaults>
   <a:extraClrSchemeLst/>
 </a:theme>
+</file>
+
+<file path=ppt/theme/theme2.xml><?xml version="1.0" encoding="utf-8"?>
+<a:theme xmlns:a="http://schemas.openxmlformats.org/drawingml/2006/main" name="Office Theme">
+  <a:themeElements>
+    <a:clrScheme name="Office">
+      <a:dk1>
+        <a:sysClr val="windowText" lastClr="000000"/>
+      </a:dk1>
+      <a:lt1>
+        <a:sysClr val="window" lastClr="FFFFFF"/>
+      </a:lt1>
+      <a:dk2>
+        <a:srgbClr val="0E2841"/>
+      </a:dk2>
+      <a:lt2>
+        <a:srgbClr val="E8E8E8"/>
+      </a:lt2>
+      <a:accent1>
+        <a:srgbClr val="156082"/>
+      </a:accent1>
+      <a:accent2>
+        <a:srgbClr val="E97132"/>
+      </a:accent2>
+      <a:accent3>
+        <a:srgbClr val="196B24"/>
+      </a:accent3>
+      <a:accent4>
+        <a:srgbClr val="0F9ED5"/>
+      </a:accent4>
+      <a:accent5>
+        <a:srgbClr val="A02B93"/>
+      </a:accent5>
+      <a:accent6>
+        <a:srgbClr val="4EA72E"/>
+      </a:accent6>
+      <a:hlink>
+        <a:srgbClr val="467886"/>
+      </a:hlink>
+      <a:folHlink>
+        <a:srgbClr val="96607D"/>
+      </a:folHlink>
+    </a:clrScheme>
+    <a:fontScheme name="Office">
+      <a:majorFont>
+        <a:latin typeface="Aptos Display" panose="02110004020202020204"/>
+        <a:ea typeface=""/>
+        <a:cs typeface=""/>
+        <a:font script="Jpan" typeface="游ゴシック Light"/>
+        <a:font script="Hang" typeface="맑은 고딕"/>
+        <a:font script="Hans" typeface="等线 Light"/>
+        <a:font script="Hant" typeface="新細明體"/>
+        <a:font script="Arab" typeface="Times New Roman"/>
+        <a:font script="Hebr" typeface="Times New Roman"/>
+        <a:font script="Thai" typeface="Angsana New"/>
+        <a:font script="Ethi" typeface="Nyala"/>
+        <a:font script="Beng" typeface="Vrinda"/>
+        <a:font script="Gujr" typeface="Shruti"/>
+        <a:font script="Khmr" typeface="MoolBoran"/>
+        <a:font script="Knda" typeface="Tunga"/>
+        <a:font script="Guru" typeface="Raavi"/>
+        <a:font script="Cans" typeface="Euphemia"/>
+        <a:font script="Cher" typeface="Plantagenet Cherokee"/>
+        <a:font script="Yiii" typeface="Microsoft Yi Baiti"/>
+        <a:font script="Tibt" typeface="Microsoft Himalaya"/>
+        <a:font script="Thaa" typeface="MV Boli"/>
+        <a:font script="Deva" typeface="Mangal"/>
+        <a:font script="Telu" typeface="Gautami"/>
+        <a:font script="Taml" typeface="Latha"/>
+        <a:font script="Syrc" typeface="Estrangelo Edessa"/>
+        <a:font script="Orya" typeface="Kalinga"/>
+        <a:font script="Mlym" typeface="Kartika"/>
+        <a:font script="Laoo" typeface="DokChampa"/>
+        <a:font script="Sinh" typeface="Iskoola Pota"/>
+        <a:font script="Mong" typeface="Mongolian Baiti"/>
+        <a:font script="Viet" typeface="Times New Roman"/>
+        <a:font script="Uigh" typeface="Microsoft Uighur"/>
+        <a:font script="Geor" typeface="Sylfaen"/>
+        <a:font script="Armn" typeface="Arial"/>
+        <a:font script="Bugi" typeface="Leelawadee UI"/>
+        <a:font script="Bopo" typeface="Microsoft JhengHei"/>
+        <a:font script="Java" typeface="Javanese Text"/>
+        <a:font script="Lisu" typeface="Segoe UI"/>
+        <a:font script="Mymr" typeface="Myanmar Text"/>
+        <a:font script="Nkoo" typeface="Ebrima"/>
+        <a:font script="Olck" typeface="Nirmala UI"/>
+        <a:font script="Osma" typeface="Ebrima"/>
+        <a:font script="Phag" typeface="Phagspa"/>
+        <a:font script="Syrn" typeface="Estrangelo Edessa"/>
+        <a:font script="Syrj" typeface="Estrangelo Edessa"/>
+        <a:font script="Syre" typeface="Estrangelo Edessa"/>
+        <a:font script="Sora" typeface="Nirmala UI"/>
+        <a:font script="Tale" typeface="Microsoft Tai Le"/>
+        <a:font script="Talu" typeface="Microsoft New Tai Lue"/>
+        <a:font script="Tfng" typeface="Ebrima"/>
+      </a:majorFont>
+      <a:minorFont>
+        <a:latin typeface="Aptos" panose="02110004020202020204"/>
+        <a:ea typeface=""/>
+        <a:cs typeface=""/>
+        <a:font script="Jpan" typeface="游ゴシック"/>
+        <a:font script="Hang" typeface="맑은 고딕"/>
+        <a:font script="Hans" typeface="等线"/>
+        <a:font script="Hant" typeface="新細明體"/>
+        <a:font script="Arab" typeface="Arial"/>
+        <a:font script="Hebr" typeface="Arial"/>
+        <a:font script="Thai" typeface="Cordia New"/>
+        <a:font script="Ethi" typeface="Nyala"/>
+        <a:font script="Beng" typeface="Vrinda"/>
+        <a:font script="Gujr" typeface="Shruti"/>
+        <a:font script="Khmr" typeface="DaunPenh"/>
+        <a:font script="Knda" typeface="Tunga"/>
+        <a:font script="Guru" typeface="Raavi"/>
+        <a:font script="Cans" typeface="Euphemia"/>
+        <a:font script="Cher" typeface="Plantagenet Cherokee"/>
+        <a:font script="Yiii" typeface="Microsoft Yi Baiti"/>
+        <a:font script="Tibt" typeface="Microsoft Himalaya"/>
+        <a:font script="Thaa" typeface="MV Boli"/>
+        <a:font script="Deva" typeface="Mangal"/>
+        <a:font script="Telu" typeface="Gautami"/>
+        <a:font script="Taml" typeface="Latha"/>
+        <a:font script="Syrc" typeface="Estrangelo Edessa"/>
+        <a:font script="Orya" typeface="Kalinga"/>
+        <a:font script="Mlym" typeface="Kartika"/>
+        <a:font script="Laoo" typeface="DokChampa"/>
+        <a:font script="Sinh" typeface="Iskoola Pota"/>
+        <a:font script="Mong" typeface="Mongolian Baiti"/>
+        <a:font script="Viet" typeface="Arial"/>
+        <a:font script="Uigh" typeface="Microsoft Uighur"/>
+        <a:font script="Geor" typeface="Sylfaen"/>
+        <a:font script="Armn" typeface="Arial"/>
+        <a:font script="Bugi" typeface="Leelawadee UI"/>
+        <a:font script="Bopo" typeface="Microsoft JhengHei"/>
+        <a:font script="Java" typeface="Javanese Text"/>
+        <a:font script="Lisu" typeface="Segoe UI"/>
+        <a:font script="Mymr" typeface="Myanmar Text"/>
+        <a:font script="Nkoo" typeface="Ebrima"/>
+        <a:font script="Olck" typeface="Nirmala UI"/>
+        <a:font script="Osma" typeface="Ebrima"/>
+        <a:font script="Phag" typeface="Phagspa"/>
+        <a:font script="Syrn" typeface="Estrangelo Edessa"/>
+        <a:font script="Syrj" typeface="Estrangelo Edessa"/>
+        <a:font script="Syre" typeface="Estrangelo Edessa"/>
+        <a:font script="Sora" typeface="Nirmala UI"/>
+        <a:font script="Tale" typeface="Microsoft Tai Le"/>
+        <a:font script="Talu" typeface="Microsoft New Tai Lue"/>
+        <a:font script="Tfng" typeface="Ebrima"/>
+      </a:minorFont>
+    </a:fontScheme>
+    <a:fmtScheme name="Office">
+      <a:fillStyleLst>
+        <a:solidFill>
+          <a:schemeClr val="phClr"/>
+        </a:solidFill>
+        <a:gradFill rotWithShape="1">
+          <a:gsLst>
+            <a:gs pos="0">
+              <a:schemeClr val="phClr">
+                <a:lumMod val="110000"/>
+                <a:satMod val="105000"/>
+                <a:tint val="67000"/>
+              </a:schemeClr>
+            </a:gs>
+            <a:gs pos="50000">
+              <a:schemeClr val="phClr">
+                <a:lumMod val="105000"/>
+                <a:satMod val="103000"/>
+                <a:tint val="73000"/>
+              </a:schemeClr>
+            </a:gs>
+            <a:gs pos="100000">
+              <a:schemeClr val="phClr">
+                <a:lumMod val="105000"/>
+                <a:satMod val="109000"/>
+                <a:tint val="81000"/>
+              </a:schemeClr>
+            </a:gs>
+          </a:gsLst>
+          <a:lin ang="5400000" scaled="0"/>
+        </a:gradFill>
+        <a:gradFill rotWithShape="1">
+          <a:gsLst>
+            <a:gs pos="0">
+              <a:schemeClr val="phClr">
+                <a:satMod val="103000"/>
+                <a:lumMod val="102000"/>
+                <a:tint val="94000"/>
+              </a:schemeClr>
+            </a:gs>
+            <a:gs pos="50000">
+              <a:schemeClr val="phClr">
+                <a:satMod val="110000"/>
+                <a:lumMod val="100000"/>
+                <a:shade val="100000"/>
+              </a:schemeClr>
+            </a:gs>
+            <a:gs pos="100000">
+              <a:schemeClr val="phClr">
+                <a:lumMod val="99000"/>
+                <a:satMod val="120000"/>
+                <a:shade val="78000"/>
+              </a:schemeClr>
+            </a:gs>
+          </a:gsLst>
+          <a:lin ang="5400000" scaled="0"/>
+        </a:gradFill>
+      </a:fillStyleLst>
+      <a:lnStyleLst>
+        <a:ln w="12700" cap="flat" cmpd="sng" algn="ctr">
+          <a:solidFill>
+            <a:schemeClr val="phClr"/>
+          </a:solidFill>
+          <a:prstDash val="solid"/>
+          <a:miter lim="800000"/>
+        </a:ln>
+        <a:ln w="19050" cap="flat" cmpd="sng" algn="ctr">
+          <a:solidFill>
+            <a:schemeClr val="phClr"/>
+          </a:solidFill>
+          <a:prstDash val="solid"/>
+          <a:miter lim="800000"/>
+        </a:ln>
+        <a:ln w="25400" cap="flat" cmpd="sng" algn="ctr">
+          <a:solidFill>
+            <a:schemeClr val="phClr"/>
+          </a:solidFill>
+          <a:prstDash val="solid"/>
+          <a:miter lim="800000"/>
+        </a:ln>
+      </a:lnStyleLst>
+      <a:effectStyleLst>
+        <a:effectStyle>
+          <a:effectLst/>
+        </a:effectStyle>
+        <a:effectStyle>
+          <a:effectLst/>
+        </a:effectStyle>
+        <a:effectStyle>
+          <a:effectLst>
+            <a:outerShdw blurRad="57150" dist="19050" dir="5400000" algn="ctr" rotWithShape="0">
+              <a:srgbClr val="000000">
+                <a:alpha val="63000"/>
+              </a:srgbClr>
+            </a:outerShdw>
+          </a:effectLst>
+        </a:effectStyle>
+      </a:effectStyleLst>
+      <a:bgFillStyleLst>
+        <a:solidFill>
+          <a:schemeClr val="phClr"/>
+        </a:solidFill>
+        <a:solidFill>
+          <a:schemeClr val="phClr">
+            <a:tint val="95000"/>
+            <a:satMod val="170000"/>
+          </a:schemeClr>
+        </a:solidFill>
+        <a:gradFill rotWithShape="1">
+          <a:gsLst>
+            <a:gs pos="0">
+              <a:schemeClr val="phClr">
+                <a:tint val="93000"/>
+                <a:satMod val="150000"/>
+                <a:shade val="98000"/>
+                <a:lumMod val="102000"/>
+              </a:schemeClr>
+            </a:gs>
+            <a:gs pos="50000">
+              <a:schemeClr val="phClr">
+                <a:tint val="98000"/>
+                <a:satMod val="130000"/>
+                <a:shade val="90000"/>
+                <a:lumMod val="103000"/>
+              </a:schemeClr>
+            </a:gs>
+            <a:gs pos="100000">
+              <a:schemeClr val="phClr">
+                <a:shade val="63000"/>
+                <a:satMod val="120000"/>
+              </a:schemeClr>
+            </a:gs>
+          </a:gsLst>
+          <a:lin ang="5400000" scaled="0"/>
+        </a:gradFill>
+      </a:bgFillStyleLst>
+    </a:fmtScheme>
+  </a:themeElements>
+  <a:objectDefaults>
+    <a:lnDef>
+      <a:spPr/>
+      <a:bodyPr/>
+      <a:lstStyle/>
+      <a:style>
+        <a:lnRef idx="2">
+          <a:schemeClr val="accent1"/>
+        </a:lnRef>
+        <a:fillRef idx="0">
+          <a:schemeClr val="accent1"/>
+        </a:fillRef>
+        <a:effectRef idx="1">
+          <a:schemeClr val="accent1"/>
+        </a:effectRef>
+        <a:fontRef idx="minor">
+          <a:schemeClr val="tx1"/>
+        </a:fontRef>
+      </a:style>
+    </a:lnDef>
+  </a:objectDefaults>
+  <a:extraClrSchemeLst/>
+  <a:extLst>
+    <a:ext uri="{05A4C25C-085E-4340-85A3-A5531E510DB2}">
+      <thm15:themeFamily xmlns:thm15="http://schemas.microsoft.com/office/thememl/2012/main" name="Office Theme" id="{2E142A2C-CD16-42D6-873A-C26D2A0506FA}" vid="{1BDDFF52-6CD6-40A5-AB3C-68EB2F1E4D0A}"/>
+    </a:ext>
+  </a:extLst>
+</a:theme>
 </file>